--- a/docs/LLM_BAKEOFF_4MODEL.pptx
+++ b/docs/LLM_BAKEOFF_4MODEL.pptx
@@ -3327,7 +3327,7 @@
                 </a:solidFill>
                 <a:latin typeface="Microsoft JhengHei"/>
               </a:rPr>
-              <a:t>Opus 4.8 品質天花板但 ~30× 成本 · Sonnet 5 被 GLM 支配 · KIMI 已淘汰</a:t>
+              <a:t>Opus 4.8 品質天花板但 ~20× 成本(direct+cache) · Sonnet 5 被 GLM 支配 · KIMI 已淘汰</a:t>
             </a:r>
           </a:p>
         </p:txBody>
@@ -4986,7 +4986,7 @@
                 </a:solidFill>
                 <a:latin typeface="Microsoft JhengHei"/>
               </a:rPr>
-              <a:t>0.9%</a:t>
+              <a:t>63%*</a:t>
             </a:r>
           </a:p>
         </p:txBody>
@@ -5028,7 +5028,7 @@
                 </a:solidFill>
                 <a:latin typeface="Microsoft JhengHei"/>
               </a:rPr>
-              <a:t>0%</a:t>
+              <a:t>52%*</a:t>
             </a:r>
           </a:p>
         </p:txBody>
@@ -5116,7 +5116,7 @@
                 </a:solidFill>
                 <a:latin typeface="Microsoft JhengHei"/>
               </a:rPr>
-              <a:t>成本/17 案</a:t>
+              <a:t>公平成本/17*</a:t>
             </a:r>
           </a:p>
         </p:txBody>
@@ -5242,7 +5242,7 @@
                 </a:solidFill>
                 <a:latin typeface="Microsoft JhengHei"/>
               </a:rPr>
-              <a:t>$18.7</a:t>
+              <a:t>$11.6*</a:t>
             </a:r>
           </a:p>
         </p:txBody>
@@ -5284,7 +5284,7 @@
                 </a:solidFill>
                 <a:latin typeface="Microsoft JhengHei"/>
               </a:rPr>
-              <a:t>$68.6</a:t>
+              <a:t>$52*</a:t>
             </a:r>
           </a:p>
         </p:txBody>
@@ -5498,7 +5498,7 @@
                 </a:solidFill>
                 <a:latin typeface="Microsoft JhengHei"/>
               </a:rPr>
-              <a:t>~9×</a:t>
+              <a:t>~5×</a:t>
             </a:r>
           </a:p>
         </p:txBody>
@@ -5540,7 +5540,7 @@
                 </a:solidFill>
                 <a:latin typeface="Microsoft JhengHei"/>
               </a:rPr>
-              <a:t>~30×</a:t>
+              <a:t>~20×</a:t>
             </a:r>
           </a:p>
         </p:txBody>
@@ -5810,7 +5810,7 @@
         <p:spPr>
           <a:xfrm>
             <a:off x="502920" y="6323075"/>
-            <a:ext cx="11155680" cy="822960"/>
+            <a:ext cx="11155680" cy="1005840"/>
           </a:xfrm>
           <a:prstGeom prst="rect">
             <a:avLst/>
@@ -5848,6 +5848,25 @@
                 <a:latin typeface="Microsoft JhengHei"/>
               </a:rPr>
               <a:t>xbar_r(只有 GLM+Opus 建對管制圖)、weco_rules(四家幾乎都漏 = 系統層弱點)。其餘 15 案四模型都對。</a:t>
+            </a:r>
+          </a:p>
+          <a:p>
+            <a:pPr algn="l">
+              <a:lnSpc>
+                <a:spcPct val="110000"/>
+              </a:lnSpc>
+              <a:spcAft>
+                <a:spcPts val="400"/>
+              </a:spcAft>
+            </a:pPr>
+            <a:r>
+              <a:rPr sz="1050" b="0">
+                <a:solidFill>
+                  <a:srgbClr val="667085"/>
+                </a:solidFill>
+                <a:latin typeface="Microsoft JhengHei"/>
+              </a:rPr>
+              <a:t>* Sonnet/Opus 成本與 cache 為 2026-07-02 direct Anthropic + cache 補測(公平值);bakeoff 當日走 OpenRouter 無 cache 為 $18.7 / $68.6。</a:t>
             </a:r>
           </a:p>
         </p:txBody>
@@ -14382,7 +14401,7 @@
                 </a:solidFill>
                 <a:latin typeface="Microsoft JhengHei"/>
               </a:rPr>
-              <a:t>0.9%</a:t>
+              <a:t>63%*</a:t>
             </a:r>
           </a:p>
           <a:p>
@@ -14410,7 +14429,7 @@
                 </a:solidFill>
                 <a:latin typeface="Microsoft JhengHei"/>
               </a:rPr>
-              <a:t>$18.7</a:t>
+              <a:t>$11.6*</a:t>
             </a:r>
           </a:p>
         </p:txBody>
@@ -14514,7 +14533,7 @@
                 </a:solidFill>
                 <a:latin typeface="Microsoft JhengHei"/>
               </a:rPr>
-              <a:t>嚴格 15/17(xbar_r 退化成折線)、成本 ~9× GLM。更貴又不更準,無採用理由。</a:t>
+              <a:t>嚴格 15/17(xbar_r 退化成折線)、direct+cache 成本 ~5× GLM。更貴又不更準,無採用理由。</a:t>
             </a:r>
           </a:p>
         </p:txBody>
@@ -18410,7 +18429,7 @@
                 </a:solidFill>
                 <a:latin typeface="Microsoft JhengHei"/>
               </a:rPr>
-              <a:t>0%</a:t>
+              <a:t>52%*</a:t>
             </a:r>
           </a:p>
           <a:p>
@@ -18438,7 +18457,7 @@
                 </a:solidFill>
                 <a:latin typeface="Microsoft JhengHei"/>
               </a:rPr>
-              <a:t>$68.6</a:t>
+              <a:t>$52*</a:t>
             </a:r>
           </a:p>
         </p:txBody>
@@ -18542,7 +18561,7 @@
                 </a:solidFill>
                 <a:latin typeface="Microsoft JhengHei"/>
               </a:rPr>
-              <a:t>嚴格 16/17 最高、最果斷(164 round),只漏 weco_rules。但 ~30× 成本、cache 失效。</a:t>
+              <a:t>嚴格 16/17 最高、最果斷(164 round),只漏 weco_rules。direct+cache 實測 ~20× GLM 成本。</a:t>
             </a:r>
           </a:p>
         </p:txBody>
@@ -22424,7 +22443,7 @@
                 </a:solidFill>
                 <a:latin typeface="Microsoft JhengHei"/>
               </a:rPr>
-              <a:t>嚴格 16/17 最高,但 ~30× 成本且 cache 走 OpenRouter 失效。只在 fleet/composite/特定管制圖人工升級時叫用,且走 direct Anthropic 恢復 cache。</a:t>
+              <a:t>嚴格 16/17 最高。direct+cache 實測 ~20× GLM 成本。只在 fleet/composite/特定管制圖人工升級時叫用,且走 direct Anthropic 才有 cache。</a:t>
             </a:r>
           </a:p>
         </p:txBody>
@@ -22531,7 +22550,7 @@
                 </a:solidFill>
                 <a:latin typeface="Microsoft JhengHei"/>
               </a:rPr>
-              <a:t>嚴格 15/17(xbar_r 退化),成本 ~9× GLM。比 GLM 貴又不更準。</a:t>
+              <a:t>嚴格 15/17(xbar_r 退化),direct+cache 成本仍 ~5× GLM。比 GLM 貴又不更準。</a:t>
             </a:r>
           </a:p>
         </p:txBody>

--- a/docs/LLM_BAKEOFF_4MODEL.pptx
+++ b/docs/LLM_BAKEOFF_4MODEL.pptx
@@ -12,6 +12,7 @@
     <p:sldId id="260" r:id="rId11"/>
     <p:sldId id="261" r:id="rId12"/>
     <p:sldId id="262" r:id="rId13"/>
+    <p:sldId id="263" r:id="rId14"/>
   </p:sldIdLst>
   <p:sldSz cx="12191695" cy="6858000" type="screen4x3"/>
   <p:notesSz cx="6858000" cy="9144000"/>
@@ -3232,13 +3233,13 @@
               </a:spcAft>
             </a:pPr>
             <a:r>
-              <a:rPr sz="3400" b="1">
+              <a:rPr sz="3200" b="1">
                 <a:solidFill>
                   <a:srgbClr val="FFFFFF"/>
                 </a:solidFill>
                 <a:latin typeface="Microsoft JhengHei"/>
               </a:rPr>
-              <a:t>KIMI · GLM-5.2 · Sonnet 5 · Opus 4.8</a:t>
+              <a:t>KIMI · GLM-5.2 · Sonnet 5 · Opus 4.8 · MA-P0</a:t>
             </a:r>
           </a:p>
           <a:p>
@@ -3508,7 +3509,7 @@
         <p:spPr>
           <a:xfrm>
             <a:off x="502920" y="1417320"/>
-            <a:ext cx="11338560" cy="534924"/>
+            <a:ext cx="11155680" cy="534924"/>
           </a:xfrm>
           <a:prstGeom prst="rect">
             <a:avLst/>
@@ -3552,7 +3553,7 @@
         <p:spPr>
           <a:xfrm>
             <a:off x="548640" y="1417320"/>
-            <a:ext cx="2286000" cy="534924"/>
+            <a:ext cx="1920240" cy="534924"/>
           </a:xfrm>
           <a:prstGeom prst="rect">
             <a:avLst/>
@@ -3593,8 +3594,8 @@
         </p:nvSpPr>
         <p:spPr>
           <a:xfrm>
-            <a:off x="2926080" y="1417320"/>
-            <a:ext cx="2148840" cy="534924"/>
+            <a:off x="2560320" y="1417320"/>
+            <a:ext cx="1737360" cy="534924"/>
           </a:xfrm>
           <a:prstGeom prst="rect">
             <a:avLst/>
@@ -3635,8 +3636,8 @@
         </p:nvSpPr>
         <p:spPr>
           <a:xfrm>
-            <a:off x="5166360" y="1417320"/>
-            <a:ext cx="2148840" cy="534924"/>
+            <a:off x="4389120" y="1417320"/>
+            <a:ext cx="1737360" cy="534924"/>
           </a:xfrm>
           <a:prstGeom prst="rect">
             <a:avLst/>
@@ -3677,8 +3678,8 @@
         </p:nvSpPr>
         <p:spPr>
           <a:xfrm>
-            <a:off x="7406640" y="1417320"/>
-            <a:ext cx="2148840" cy="534924"/>
+            <a:off x="6217920" y="1417320"/>
+            <a:ext cx="1737360" cy="534924"/>
           </a:xfrm>
           <a:prstGeom prst="rect">
             <a:avLst/>
@@ -3719,8 +3720,8 @@
         </p:nvSpPr>
         <p:spPr>
           <a:xfrm>
-            <a:off x="9646920" y="1417320"/>
-            <a:ext cx="2148840" cy="534924"/>
+            <a:off x="8046720" y="1417320"/>
+            <a:ext cx="1737360" cy="534924"/>
           </a:xfrm>
           <a:prstGeom prst="rect">
             <a:avLst/>
@@ -3755,14 +3756,56 @@
       </p:sp>
       <p:sp>
         <p:nvSpPr>
-          <p:cNvPr id="11" name="Rectangle 10"/>
+          <p:cNvPr id="11" name="TextBox 10"/>
+          <p:cNvSpPr txBox="1"/>
+          <p:nvPr/>
+        </p:nvSpPr>
+        <p:spPr>
+          <a:xfrm>
+            <a:off x="9875520" y="1417320"/>
+            <a:ext cx="1737360" cy="534924"/>
+          </a:xfrm>
+          <a:prstGeom prst="rect">
+            <a:avLst/>
+          </a:prstGeom>
+          <a:noFill/>
+        </p:spPr>
+        <p:txBody>
+          <a:bodyPr wrap="square" anchor="ctr">
+            <a:spAutoFit/>
+          </a:bodyPr>
+          <a:lstStyle/>
+          <a:p>
+            <a:pPr algn="ctr">
+              <a:lnSpc>
+                <a:spcPct val="100000"/>
+              </a:lnSpc>
+              <a:spcAft>
+                <a:spcPts val="300"/>
+              </a:spcAft>
+            </a:pPr>
+            <a:r>
+              <a:rPr sz="1200" b="1">
+                <a:solidFill>
+                  <a:srgbClr val="FFFFFF"/>
+                </a:solidFill>
+                <a:latin typeface="Microsoft JhengHei"/>
+              </a:rPr>
+              <a:t>GLM@MA-P0</a:t>
+            </a:r>
+          </a:p>
+        </p:txBody>
+      </p:sp>
+      <p:sp>
+        <p:nvSpPr>
+          <p:cNvPr id="12" name="Rectangle 11"/>
           <p:cNvSpPr/>
           <p:nvPr/>
         </p:nvSpPr>
         <p:spPr>
           <a:xfrm>
             <a:off x="502920" y="1952243"/>
-            <a:ext cx="11338560" cy="534924"/>
+            <a:ext cx="11155680" cy="534924"/>
           </a:xfrm>
           <a:prstGeom prst="rect">
             <a:avLst/>
@@ -3801,14 +3844,14 @@
       </p:sp>
       <p:sp>
         <p:nvSpPr>
-          <p:cNvPr id="12" name="TextBox 11"/>
+          <p:cNvPr id="13" name="TextBox 12"/>
           <p:cNvSpPr txBox="1"/>
           <p:nvPr/>
         </p:nvSpPr>
         <p:spPr>
           <a:xfrm>
             <a:off x="548640" y="1952243"/>
-            <a:ext cx="2286000" cy="534924"/>
+            <a:ext cx="1920240" cy="534924"/>
           </a:xfrm>
           <a:prstGeom prst="rect">
             <a:avLst/>
@@ -3843,14 +3886,14 @@
       </p:sp>
       <p:sp>
         <p:nvSpPr>
-          <p:cNvPr id="13" name="TextBox 12"/>
+          <p:cNvPr id="14" name="TextBox 13"/>
           <p:cNvSpPr txBox="1"/>
           <p:nvPr/>
         </p:nvSpPr>
         <p:spPr>
           <a:xfrm>
-            <a:off x="2926080" y="1952243"/>
-            <a:ext cx="2148840" cy="534924"/>
+            <a:off x="2560320" y="1952243"/>
+            <a:ext cx="1737360" cy="534924"/>
           </a:xfrm>
           <a:prstGeom prst="rect">
             <a:avLst/>
@@ -3885,14 +3928,14 @@
       </p:sp>
       <p:sp>
         <p:nvSpPr>
-          <p:cNvPr id="14" name="TextBox 13"/>
+          <p:cNvPr id="15" name="TextBox 14"/>
           <p:cNvSpPr txBox="1"/>
           <p:nvPr/>
         </p:nvSpPr>
         <p:spPr>
           <a:xfrm>
-            <a:off x="5166360" y="1952243"/>
-            <a:ext cx="2148840" cy="534924"/>
+            <a:off x="4389120" y="1952243"/>
+            <a:ext cx="1737360" cy="534924"/>
           </a:xfrm>
           <a:prstGeom prst="rect">
             <a:avLst/>
@@ -3927,14 +3970,14 @@
       </p:sp>
       <p:sp>
         <p:nvSpPr>
-          <p:cNvPr id="15" name="TextBox 14"/>
+          <p:cNvPr id="16" name="TextBox 15"/>
           <p:cNvSpPr txBox="1"/>
           <p:nvPr/>
         </p:nvSpPr>
         <p:spPr>
           <a:xfrm>
-            <a:off x="7406640" y="1952243"/>
-            <a:ext cx="2148840" cy="534924"/>
+            <a:off x="6217920" y="1952243"/>
+            <a:ext cx="1737360" cy="534924"/>
           </a:xfrm>
           <a:prstGeom prst="rect">
             <a:avLst/>
@@ -3969,14 +4012,14 @@
       </p:sp>
       <p:sp>
         <p:nvSpPr>
-          <p:cNvPr id="16" name="TextBox 15"/>
+          <p:cNvPr id="17" name="TextBox 16"/>
           <p:cNvSpPr txBox="1"/>
           <p:nvPr/>
         </p:nvSpPr>
         <p:spPr>
           <a:xfrm>
-            <a:off x="9646920" y="1952243"/>
-            <a:ext cx="2148840" cy="534924"/>
+            <a:off x="8046720" y="1952243"/>
+            <a:ext cx="1737360" cy="534924"/>
           </a:xfrm>
           <a:prstGeom prst="rect">
             <a:avLst/>
@@ -4011,14 +4054,56 @@
       </p:sp>
       <p:sp>
         <p:nvSpPr>
-          <p:cNvPr id="17" name="Rectangle 16"/>
+          <p:cNvPr id="18" name="TextBox 17"/>
+          <p:cNvSpPr txBox="1"/>
+          <p:nvPr/>
+        </p:nvSpPr>
+        <p:spPr>
+          <a:xfrm>
+            <a:off x="9875520" y="1952243"/>
+            <a:ext cx="1737360" cy="534924"/>
+          </a:xfrm>
+          <a:prstGeom prst="rect">
+            <a:avLst/>
+          </a:prstGeom>
+          <a:noFill/>
+        </p:spPr>
+        <p:txBody>
+          <a:bodyPr wrap="square" anchor="ctr">
+            <a:spAutoFit/>
+          </a:bodyPr>
+          <a:lstStyle/>
+          <a:p>
+            <a:pPr algn="ctr">
+              <a:lnSpc>
+                <a:spcPct val="100000"/>
+              </a:lnSpc>
+              <a:spcAft>
+                <a:spcPts val="300"/>
+              </a:spcAft>
+            </a:pPr>
+            <a:r>
+              <a:rPr sz="1150" b="0">
+                <a:solidFill>
+                  <a:srgbClr val="1F2933"/>
+                </a:solidFill>
+                <a:latin typeface="Microsoft JhengHei"/>
+              </a:rPr>
+              <a:t>17/17</a:t>
+            </a:r>
+          </a:p>
+        </p:txBody>
+      </p:sp>
+      <p:sp>
+        <p:nvSpPr>
+          <p:cNvPr id="19" name="Rectangle 18"/>
           <p:cNvSpPr/>
           <p:nvPr/>
         </p:nvSpPr>
         <p:spPr>
           <a:xfrm>
             <a:off x="502920" y="2487168"/>
-            <a:ext cx="11338560" cy="534924"/>
+            <a:ext cx="11155680" cy="534924"/>
           </a:xfrm>
           <a:prstGeom prst="rect">
             <a:avLst/>
@@ -4057,14 +4142,14 @@
       </p:sp>
       <p:sp>
         <p:nvSpPr>
-          <p:cNvPr id="18" name="TextBox 17"/>
+          <p:cNvPr id="20" name="TextBox 19"/>
           <p:cNvSpPr txBox="1"/>
           <p:nvPr/>
         </p:nvSpPr>
         <p:spPr>
           <a:xfrm>
             <a:off x="548640" y="2487168"/>
-            <a:ext cx="2286000" cy="534924"/>
+            <a:ext cx="1920240" cy="534924"/>
           </a:xfrm>
           <a:prstGeom prst="rect">
             <a:avLst/>
@@ -4099,14 +4184,14 @@
       </p:sp>
       <p:sp>
         <p:nvSpPr>
-          <p:cNvPr id="19" name="TextBox 18"/>
+          <p:cNvPr id="21" name="TextBox 20"/>
           <p:cNvSpPr txBox="1"/>
           <p:nvPr/>
         </p:nvSpPr>
         <p:spPr>
           <a:xfrm>
-            <a:off x="2926080" y="2487168"/>
-            <a:ext cx="2148840" cy="534924"/>
+            <a:off x="2560320" y="2487168"/>
+            <a:ext cx="1737360" cy="534924"/>
           </a:xfrm>
           <a:prstGeom prst="rect">
             <a:avLst/>
@@ -4141,14 +4226,14 @@
       </p:sp>
       <p:sp>
         <p:nvSpPr>
-          <p:cNvPr id="20" name="TextBox 19"/>
+          <p:cNvPr id="22" name="TextBox 21"/>
           <p:cNvSpPr txBox="1"/>
           <p:nvPr/>
         </p:nvSpPr>
         <p:spPr>
           <a:xfrm>
-            <a:off x="5166360" y="2487168"/>
-            <a:ext cx="2148840" cy="534924"/>
+            <a:off x="4389120" y="2487168"/>
+            <a:ext cx="1737360" cy="534924"/>
           </a:xfrm>
           <a:prstGeom prst="rect">
             <a:avLst/>
@@ -4183,14 +4268,14 @@
       </p:sp>
       <p:sp>
         <p:nvSpPr>
-          <p:cNvPr id="21" name="TextBox 20"/>
+          <p:cNvPr id="23" name="TextBox 22"/>
           <p:cNvSpPr txBox="1"/>
           <p:nvPr/>
         </p:nvSpPr>
         <p:spPr>
           <a:xfrm>
-            <a:off x="7406640" y="2487168"/>
-            <a:ext cx="2148840" cy="534924"/>
+            <a:off x="6217920" y="2487168"/>
+            <a:ext cx="1737360" cy="534924"/>
           </a:xfrm>
           <a:prstGeom prst="rect">
             <a:avLst/>
@@ -4225,14 +4310,14 @@
       </p:sp>
       <p:sp>
         <p:nvSpPr>
-          <p:cNvPr id="22" name="TextBox 21"/>
+          <p:cNvPr id="24" name="TextBox 23"/>
           <p:cNvSpPr txBox="1"/>
           <p:nvPr/>
         </p:nvSpPr>
         <p:spPr>
           <a:xfrm>
-            <a:off x="9646920" y="2487168"/>
-            <a:ext cx="2148840" cy="534924"/>
+            <a:off x="8046720" y="2487168"/>
+            <a:ext cx="1737360" cy="534924"/>
           </a:xfrm>
           <a:prstGeom prst="rect">
             <a:avLst/>
@@ -4267,14 +4352,56 @@
       </p:sp>
       <p:sp>
         <p:nvSpPr>
-          <p:cNvPr id="23" name="Rectangle 22"/>
+          <p:cNvPr id="25" name="TextBox 24"/>
+          <p:cNvSpPr txBox="1"/>
+          <p:nvPr/>
+        </p:nvSpPr>
+        <p:spPr>
+          <a:xfrm>
+            <a:off x="9875520" y="2487168"/>
+            <a:ext cx="1737360" cy="534924"/>
+          </a:xfrm>
+          <a:prstGeom prst="rect">
+            <a:avLst/>
+          </a:prstGeom>
+          <a:noFill/>
+        </p:spPr>
+        <p:txBody>
+          <a:bodyPr wrap="square" anchor="ctr">
+            <a:spAutoFit/>
+          </a:bodyPr>
+          <a:lstStyle/>
+          <a:p>
+            <a:pPr algn="ctr">
+              <a:lnSpc>
+                <a:spcPct val="100000"/>
+              </a:lnSpc>
+              <a:spcAft>
+                <a:spcPts val="300"/>
+              </a:spcAft>
+            </a:pPr>
+            <a:r>
+              <a:rPr sz="1150" b="0">
+                <a:solidFill>
+                  <a:srgbClr val="1F2933"/>
+                </a:solidFill>
+                <a:latin typeface="Microsoft JhengHei"/>
+              </a:rPr>
+              <a:t>17/17</a:t>
+            </a:r>
+          </a:p>
+        </p:txBody>
+      </p:sp>
+      <p:sp>
+        <p:nvSpPr>
+          <p:cNvPr id="26" name="Rectangle 25"/>
           <p:cNvSpPr/>
           <p:nvPr/>
         </p:nvSpPr>
         <p:spPr>
           <a:xfrm>
             <a:off x="502920" y="3022091"/>
-            <a:ext cx="11338560" cy="534924"/>
+            <a:ext cx="11155680" cy="534924"/>
           </a:xfrm>
           <a:prstGeom prst="rect">
             <a:avLst/>
@@ -4313,14 +4440,14 @@
       </p:sp>
       <p:sp>
         <p:nvSpPr>
-          <p:cNvPr id="24" name="TextBox 23"/>
+          <p:cNvPr id="27" name="TextBox 26"/>
           <p:cNvSpPr txBox="1"/>
           <p:nvPr/>
         </p:nvSpPr>
         <p:spPr>
           <a:xfrm>
             <a:off x="548640" y="3022091"/>
-            <a:ext cx="2286000" cy="534924"/>
+            <a:ext cx="1920240" cy="534924"/>
           </a:xfrm>
           <a:prstGeom prst="rect">
             <a:avLst/>
@@ -4355,14 +4482,14 @@
       </p:sp>
       <p:sp>
         <p:nvSpPr>
-          <p:cNvPr id="25" name="TextBox 24"/>
+          <p:cNvPr id="28" name="TextBox 27"/>
           <p:cNvSpPr txBox="1"/>
           <p:nvPr/>
         </p:nvSpPr>
         <p:spPr>
           <a:xfrm>
-            <a:off x="2926080" y="3022091"/>
-            <a:ext cx="2148840" cy="534924"/>
+            <a:off x="2560320" y="3022091"/>
+            <a:ext cx="1737360" cy="534924"/>
           </a:xfrm>
           <a:prstGeom prst="rect">
             <a:avLst/>
@@ -4397,14 +4524,14 @@
       </p:sp>
       <p:sp>
         <p:nvSpPr>
-          <p:cNvPr id="26" name="TextBox 25"/>
+          <p:cNvPr id="29" name="TextBox 28"/>
           <p:cNvSpPr txBox="1"/>
           <p:nvPr/>
         </p:nvSpPr>
         <p:spPr>
           <a:xfrm>
-            <a:off x="5166360" y="3022091"/>
-            <a:ext cx="2148840" cy="534924"/>
+            <a:off x="4389120" y="3022091"/>
+            <a:ext cx="1737360" cy="534924"/>
           </a:xfrm>
           <a:prstGeom prst="rect">
             <a:avLst/>
@@ -4439,14 +4566,14 @@
       </p:sp>
       <p:sp>
         <p:nvSpPr>
-          <p:cNvPr id="27" name="TextBox 26"/>
+          <p:cNvPr id="30" name="TextBox 29"/>
           <p:cNvSpPr txBox="1"/>
           <p:nvPr/>
         </p:nvSpPr>
         <p:spPr>
           <a:xfrm>
-            <a:off x="7406640" y="3022091"/>
-            <a:ext cx="2148840" cy="534924"/>
+            <a:off x="6217920" y="3022091"/>
+            <a:ext cx="1737360" cy="534924"/>
           </a:xfrm>
           <a:prstGeom prst="rect">
             <a:avLst/>
@@ -4481,14 +4608,14 @@
       </p:sp>
       <p:sp>
         <p:nvSpPr>
-          <p:cNvPr id="28" name="TextBox 27"/>
+          <p:cNvPr id="31" name="TextBox 30"/>
           <p:cNvSpPr txBox="1"/>
           <p:nvPr/>
         </p:nvSpPr>
         <p:spPr>
           <a:xfrm>
-            <a:off x="9646920" y="3022091"/>
-            <a:ext cx="2148840" cy="534924"/>
+            <a:off x="8046720" y="3022091"/>
+            <a:ext cx="1737360" cy="534924"/>
           </a:xfrm>
           <a:prstGeom prst="rect">
             <a:avLst/>
@@ -4523,14 +4650,56 @@
       </p:sp>
       <p:sp>
         <p:nvSpPr>
-          <p:cNvPr id="29" name="Rectangle 28"/>
+          <p:cNvPr id="32" name="TextBox 31"/>
+          <p:cNvSpPr txBox="1"/>
+          <p:nvPr/>
+        </p:nvSpPr>
+        <p:spPr>
+          <a:xfrm>
+            <a:off x="9875520" y="3022091"/>
+            <a:ext cx="1737360" cy="534924"/>
+          </a:xfrm>
+          <a:prstGeom prst="rect">
+            <a:avLst/>
+          </a:prstGeom>
+          <a:noFill/>
+        </p:spPr>
+        <p:txBody>
+          <a:bodyPr wrap="square" anchor="ctr">
+            <a:spAutoFit/>
+          </a:bodyPr>
+          <a:lstStyle/>
+          <a:p>
+            <a:pPr algn="ctr">
+              <a:lnSpc>
+                <a:spcPct val="100000"/>
+              </a:lnSpc>
+              <a:spcAft>
+                <a:spcPts val="300"/>
+              </a:spcAft>
+            </a:pPr>
+            <a:r>
+              <a:rPr sz="1150" b="0">
+                <a:solidFill>
+                  <a:srgbClr val="1F2933"/>
+                </a:solidFill>
+                <a:latin typeface="Microsoft JhengHei"/>
+              </a:rPr>
+              <a:t>22.3 min</a:t>
+            </a:r>
+          </a:p>
+        </p:txBody>
+      </p:sp>
+      <p:sp>
+        <p:nvSpPr>
+          <p:cNvPr id="33" name="Rectangle 32"/>
           <p:cNvSpPr/>
           <p:nvPr/>
         </p:nvSpPr>
         <p:spPr>
           <a:xfrm>
             <a:off x="502920" y="3557015"/>
-            <a:ext cx="11338560" cy="534924"/>
+            <a:ext cx="11155680" cy="534924"/>
           </a:xfrm>
           <a:prstGeom prst="rect">
             <a:avLst/>
@@ -4569,14 +4738,14 @@
       </p:sp>
       <p:sp>
         <p:nvSpPr>
-          <p:cNvPr id="30" name="TextBox 29"/>
+          <p:cNvPr id="34" name="TextBox 33"/>
           <p:cNvSpPr txBox="1"/>
           <p:nvPr/>
         </p:nvSpPr>
         <p:spPr>
           <a:xfrm>
             <a:off x="548640" y="3557015"/>
-            <a:ext cx="2286000" cy="534924"/>
+            <a:ext cx="1920240" cy="534924"/>
           </a:xfrm>
           <a:prstGeom prst="rect">
             <a:avLst/>
@@ -4611,14 +4780,14 @@
       </p:sp>
       <p:sp>
         <p:nvSpPr>
-          <p:cNvPr id="31" name="TextBox 30"/>
+          <p:cNvPr id="35" name="TextBox 34"/>
           <p:cNvSpPr txBox="1"/>
           <p:nvPr/>
         </p:nvSpPr>
         <p:spPr>
           <a:xfrm>
-            <a:off x="2926080" y="3557015"/>
-            <a:ext cx="2148840" cy="534924"/>
+            <a:off x="2560320" y="3557015"/>
+            <a:ext cx="1737360" cy="534924"/>
           </a:xfrm>
           <a:prstGeom prst="rect">
             <a:avLst/>
@@ -4653,14 +4822,14 @@
       </p:sp>
       <p:sp>
         <p:nvSpPr>
-          <p:cNvPr id="32" name="TextBox 31"/>
+          <p:cNvPr id="36" name="TextBox 35"/>
           <p:cNvSpPr txBox="1"/>
           <p:nvPr/>
         </p:nvSpPr>
         <p:spPr>
           <a:xfrm>
-            <a:off x="5166360" y="3557015"/>
-            <a:ext cx="2148840" cy="534924"/>
+            <a:off x="4389120" y="3557015"/>
+            <a:ext cx="1737360" cy="534924"/>
           </a:xfrm>
           <a:prstGeom prst="rect">
             <a:avLst/>
@@ -4695,14 +4864,14 @@
       </p:sp>
       <p:sp>
         <p:nvSpPr>
-          <p:cNvPr id="33" name="TextBox 32"/>
+          <p:cNvPr id="37" name="TextBox 36"/>
           <p:cNvSpPr txBox="1"/>
           <p:nvPr/>
         </p:nvSpPr>
         <p:spPr>
           <a:xfrm>
-            <a:off x="7406640" y="3557015"/>
-            <a:ext cx="2148840" cy="534924"/>
+            <a:off x="6217920" y="3557015"/>
+            <a:ext cx="1737360" cy="534924"/>
           </a:xfrm>
           <a:prstGeom prst="rect">
             <a:avLst/>
@@ -4737,14 +4906,14 @@
       </p:sp>
       <p:sp>
         <p:nvSpPr>
-          <p:cNvPr id="34" name="TextBox 33"/>
+          <p:cNvPr id="38" name="TextBox 37"/>
           <p:cNvSpPr txBox="1"/>
           <p:nvPr/>
         </p:nvSpPr>
         <p:spPr>
           <a:xfrm>
-            <a:off x="9646920" y="3557015"/>
-            <a:ext cx="2148840" cy="534924"/>
+            <a:off x="8046720" y="3557015"/>
+            <a:ext cx="1737360" cy="534924"/>
           </a:xfrm>
           <a:prstGeom prst="rect">
             <a:avLst/>
@@ -4779,14 +4948,56 @@
       </p:sp>
       <p:sp>
         <p:nvSpPr>
-          <p:cNvPr id="35" name="Rectangle 34"/>
+          <p:cNvPr id="39" name="TextBox 38"/>
+          <p:cNvSpPr txBox="1"/>
+          <p:nvPr/>
+        </p:nvSpPr>
+        <p:spPr>
+          <a:xfrm>
+            <a:off x="9875520" y="3557015"/>
+            <a:ext cx="1737360" cy="534924"/>
+          </a:xfrm>
+          <a:prstGeom prst="rect">
+            <a:avLst/>
+          </a:prstGeom>
+          <a:noFill/>
+        </p:spPr>
+        <p:txBody>
+          <a:bodyPr wrap="square" anchor="ctr">
+            <a:spAutoFit/>
+          </a:bodyPr>
+          <a:lstStyle/>
+          <a:p>
+            <a:pPr algn="ctr">
+              <a:lnSpc>
+                <a:spcPct val="100000"/>
+              </a:lnSpc>
+              <a:spcAft>
+                <a:spcPts val="300"/>
+              </a:spcAft>
+            </a:pPr>
+            <a:r>
+              <a:rPr sz="1150" b="0">
+                <a:solidFill>
+                  <a:srgbClr val="1F2933"/>
+                </a:solidFill>
+                <a:latin typeface="Microsoft JhengHei"/>
+              </a:rPr>
+              <a:t>237</a:t>
+            </a:r>
+          </a:p>
+        </p:txBody>
+      </p:sp>
+      <p:sp>
+        <p:nvSpPr>
+          <p:cNvPr id="40" name="Rectangle 39"/>
           <p:cNvSpPr/>
           <p:nvPr/>
         </p:nvSpPr>
         <p:spPr>
           <a:xfrm>
             <a:off x="502920" y="4091939"/>
-            <a:ext cx="11338560" cy="534924"/>
+            <a:ext cx="11155680" cy="534924"/>
           </a:xfrm>
           <a:prstGeom prst="rect">
             <a:avLst/>
@@ -4825,14 +5036,14 @@
       </p:sp>
       <p:sp>
         <p:nvSpPr>
-          <p:cNvPr id="36" name="TextBox 35"/>
+          <p:cNvPr id="41" name="TextBox 40"/>
           <p:cNvSpPr txBox="1"/>
           <p:nvPr/>
         </p:nvSpPr>
         <p:spPr>
           <a:xfrm>
             <a:off x="548640" y="4091939"/>
-            <a:ext cx="2286000" cy="534924"/>
+            <a:ext cx="1920240" cy="534924"/>
           </a:xfrm>
           <a:prstGeom prst="rect">
             <a:avLst/>
@@ -4867,14 +5078,14 @@
       </p:sp>
       <p:sp>
         <p:nvSpPr>
-          <p:cNvPr id="37" name="TextBox 36"/>
+          <p:cNvPr id="42" name="TextBox 41"/>
           <p:cNvSpPr txBox="1"/>
           <p:nvPr/>
         </p:nvSpPr>
         <p:spPr>
           <a:xfrm>
-            <a:off x="2926080" y="4091939"/>
-            <a:ext cx="2148840" cy="534924"/>
+            <a:off x="2560320" y="4091939"/>
+            <a:ext cx="1737360" cy="534924"/>
           </a:xfrm>
           <a:prstGeom prst="rect">
             <a:avLst/>
@@ -4909,14 +5120,14 @@
       </p:sp>
       <p:sp>
         <p:nvSpPr>
-          <p:cNvPr id="38" name="TextBox 37"/>
+          <p:cNvPr id="43" name="TextBox 42"/>
           <p:cNvSpPr txBox="1"/>
           <p:nvPr/>
         </p:nvSpPr>
         <p:spPr>
           <a:xfrm>
-            <a:off x="5166360" y="4091939"/>
-            <a:ext cx="2148840" cy="534924"/>
+            <a:off x="4389120" y="4091939"/>
+            <a:ext cx="1737360" cy="534924"/>
           </a:xfrm>
           <a:prstGeom prst="rect">
             <a:avLst/>
@@ -4951,14 +5162,14 @@
       </p:sp>
       <p:sp>
         <p:nvSpPr>
-          <p:cNvPr id="39" name="TextBox 38"/>
+          <p:cNvPr id="44" name="TextBox 43"/>
           <p:cNvSpPr txBox="1"/>
           <p:nvPr/>
         </p:nvSpPr>
         <p:spPr>
           <a:xfrm>
-            <a:off x="7406640" y="4091939"/>
-            <a:ext cx="2148840" cy="534924"/>
+            <a:off x="6217920" y="4091939"/>
+            <a:ext cx="1737360" cy="534924"/>
           </a:xfrm>
           <a:prstGeom prst="rect">
             <a:avLst/>
@@ -4993,14 +5204,14 @@
       </p:sp>
       <p:sp>
         <p:nvSpPr>
-          <p:cNvPr id="40" name="TextBox 39"/>
+          <p:cNvPr id="45" name="TextBox 44"/>
           <p:cNvSpPr txBox="1"/>
           <p:nvPr/>
         </p:nvSpPr>
         <p:spPr>
           <a:xfrm>
-            <a:off x="9646920" y="4091939"/>
-            <a:ext cx="2148840" cy="534924"/>
+            <a:off x="8046720" y="4091939"/>
+            <a:ext cx="1737360" cy="534924"/>
           </a:xfrm>
           <a:prstGeom prst="rect">
             <a:avLst/>
@@ -5035,14 +5246,56 @@
       </p:sp>
       <p:sp>
         <p:nvSpPr>
-          <p:cNvPr id="41" name="Rectangle 40"/>
+          <p:cNvPr id="46" name="TextBox 45"/>
+          <p:cNvSpPr txBox="1"/>
+          <p:nvPr/>
+        </p:nvSpPr>
+        <p:spPr>
+          <a:xfrm>
+            <a:off x="9875520" y="4091939"/>
+            <a:ext cx="1737360" cy="534924"/>
+          </a:xfrm>
+          <a:prstGeom prst="rect">
+            <a:avLst/>
+          </a:prstGeom>
+          <a:noFill/>
+        </p:spPr>
+        <p:txBody>
+          <a:bodyPr wrap="square" anchor="ctr">
+            <a:spAutoFit/>
+          </a:bodyPr>
+          <a:lstStyle/>
+          <a:p>
+            <a:pPr algn="ctr">
+              <a:lnSpc>
+                <a:spcPct val="100000"/>
+              </a:lnSpc>
+              <a:spcAft>
+                <a:spcPts val="300"/>
+              </a:spcAft>
+            </a:pPr>
+            <a:r>
+              <a:rPr sz="1150" b="0">
+                <a:solidFill>
+                  <a:srgbClr val="1F2933"/>
+                </a:solidFill>
+                <a:latin typeface="Microsoft JhengHei"/>
+              </a:rPr>
+              <a:t>54.7%</a:t>
+            </a:r>
+          </a:p>
+        </p:txBody>
+      </p:sp>
+      <p:sp>
+        <p:nvSpPr>
+          <p:cNvPr id="47" name="Rectangle 46"/>
           <p:cNvSpPr/>
           <p:nvPr/>
         </p:nvSpPr>
         <p:spPr>
           <a:xfrm>
             <a:off x="502920" y="4626864"/>
-            <a:ext cx="11338560" cy="534924"/>
+            <a:ext cx="11155680" cy="534924"/>
           </a:xfrm>
           <a:prstGeom prst="rect">
             <a:avLst/>
@@ -5081,14 +5334,14 @@
       </p:sp>
       <p:sp>
         <p:nvSpPr>
-          <p:cNvPr id="42" name="TextBox 41"/>
+          <p:cNvPr id="48" name="TextBox 47"/>
           <p:cNvSpPr txBox="1"/>
           <p:nvPr/>
         </p:nvSpPr>
         <p:spPr>
           <a:xfrm>
             <a:off x="548640" y="4626864"/>
-            <a:ext cx="2286000" cy="534924"/>
+            <a:ext cx="1920240" cy="534924"/>
           </a:xfrm>
           <a:prstGeom prst="rect">
             <a:avLst/>
@@ -5123,14 +5376,14 @@
       </p:sp>
       <p:sp>
         <p:nvSpPr>
-          <p:cNvPr id="43" name="TextBox 42"/>
+          <p:cNvPr id="49" name="TextBox 48"/>
           <p:cNvSpPr txBox="1"/>
           <p:nvPr/>
         </p:nvSpPr>
         <p:spPr>
           <a:xfrm>
-            <a:off x="2926080" y="4626864"/>
-            <a:ext cx="2148840" cy="534924"/>
+            <a:off x="2560320" y="4626864"/>
+            <a:ext cx="1737360" cy="534924"/>
           </a:xfrm>
           <a:prstGeom prst="rect">
             <a:avLst/>
@@ -5165,14 +5418,14 @@
       </p:sp>
       <p:sp>
         <p:nvSpPr>
-          <p:cNvPr id="44" name="TextBox 43"/>
+          <p:cNvPr id="50" name="TextBox 49"/>
           <p:cNvSpPr txBox="1"/>
           <p:nvPr/>
         </p:nvSpPr>
         <p:spPr>
           <a:xfrm>
-            <a:off x="5166360" y="4626864"/>
-            <a:ext cx="2148840" cy="534924"/>
+            <a:off x="4389120" y="4626864"/>
+            <a:ext cx="1737360" cy="534924"/>
           </a:xfrm>
           <a:prstGeom prst="rect">
             <a:avLst/>
@@ -5207,14 +5460,14 @@
       </p:sp>
       <p:sp>
         <p:nvSpPr>
-          <p:cNvPr id="45" name="TextBox 44"/>
+          <p:cNvPr id="51" name="TextBox 50"/>
           <p:cNvSpPr txBox="1"/>
           <p:nvPr/>
         </p:nvSpPr>
         <p:spPr>
           <a:xfrm>
-            <a:off x="7406640" y="4626864"/>
-            <a:ext cx="2148840" cy="534924"/>
+            <a:off x="6217920" y="4626864"/>
+            <a:ext cx="1737360" cy="534924"/>
           </a:xfrm>
           <a:prstGeom prst="rect">
             <a:avLst/>
@@ -5249,14 +5502,14 @@
       </p:sp>
       <p:sp>
         <p:nvSpPr>
-          <p:cNvPr id="46" name="TextBox 45"/>
+          <p:cNvPr id="52" name="TextBox 51"/>
           <p:cNvSpPr txBox="1"/>
           <p:nvPr/>
         </p:nvSpPr>
         <p:spPr>
           <a:xfrm>
-            <a:off x="9646920" y="4626864"/>
-            <a:ext cx="2148840" cy="534924"/>
+            <a:off x="8046720" y="4626864"/>
+            <a:ext cx="1737360" cy="534924"/>
           </a:xfrm>
           <a:prstGeom prst="rect">
             <a:avLst/>
@@ -5291,14 +5544,56 @@
       </p:sp>
       <p:sp>
         <p:nvSpPr>
-          <p:cNvPr id="47" name="Rectangle 46"/>
+          <p:cNvPr id="53" name="TextBox 52"/>
+          <p:cNvSpPr txBox="1"/>
+          <p:nvPr/>
+        </p:nvSpPr>
+        <p:spPr>
+          <a:xfrm>
+            <a:off x="9875520" y="4626864"/>
+            <a:ext cx="1737360" cy="534924"/>
+          </a:xfrm>
+          <a:prstGeom prst="rect">
+            <a:avLst/>
+          </a:prstGeom>
+          <a:noFill/>
+        </p:spPr>
+        <p:txBody>
+          <a:bodyPr wrap="square" anchor="ctr">
+            <a:spAutoFit/>
+          </a:bodyPr>
+          <a:lstStyle/>
+          <a:p>
+            <a:pPr algn="ctr">
+              <a:lnSpc>
+                <a:spcPct val="100000"/>
+              </a:lnSpc>
+              <a:spcAft>
+                <a:spcPts val="300"/>
+              </a:spcAft>
+            </a:pPr>
+            <a:r>
+              <a:rPr sz="1150" b="0">
+                <a:solidFill>
+                  <a:srgbClr val="1F2933"/>
+                </a:solidFill>
+                <a:latin typeface="Microsoft JhengHei"/>
+              </a:rPr>
+              <a:t>~$1.3</a:t>
+            </a:r>
+          </a:p>
+        </p:txBody>
+      </p:sp>
+      <p:sp>
+        <p:nvSpPr>
+          <p:cNvPr id="54" name="Rectangle 53"/>
           <p:cNvSpPr/>
           <p:nvPr/>
         </p:nvSpPr>
         <p:spPr>
           <a:xfrm>
             <a:off x="502920" y="5161788"/>
-            <a:ext cx="11338560" cy="534924"/>
+            <a:ext cx="11155680" cy="534924"/>
           </a:xfrm>
           <a:prstGeom prst="rect">
             <a:avLst/>
@@ -5337,14 +5632,14 @@
       </p:sp>
       <p:sp>
         <p:nvSpPr>
-          <p:cNvPr id="48" name="TextBox 47"/>
+          <p:cNvPr id="55" name="TextBox 54"/>
           <p:cNvSpPr txBox="1"/>
           <p:nvPr/>
         </p:nvSpPr>
         <p:spPr>
           <a:xfrm>
             <a:off x="548640" y="5161788"/>
-            <a:ext cx="2286000" cy="534924"/>
+            <a:ext cx="1920240" cy="534924"/>
           </a:xfrm>
           <a:prstGeom prst="rect">
             <a:avLst/>
@@ -5379,14 +5674,14 @@
       </p:sp>
       <p:sp>
         <p:nvSpPr>
-          <p:cNvPr id="49" name="TextBox 48"/>
+          <p:cNvPr id="56" name="TextBox 55"/>
           <p:cNvSpPr txBox="1"/>
           <p:nvPr/>
         </p:nvSpPr>
         <p:spPr>
           <a:xfrm>
-            <a:off x="2926080" y="5161788"/>
-            <a:ext cx="2148840" cy="534924"/>
+            <a:off x="2560320" y="5161788"/>
+            <a:ext cx="1737360" cy="534924"/>
           </a:xfrm>
           <a:prstGeom prst="rect">
             <a:avLst/>
@@ -5421,14 +5716,14 @@
       </p:sp>
       <p:sp>
         <p:nvSpPr>
-          <p:cNvPr id="50" name="TextBox 49"/>
+          <p:cNvPr id="57" name="TextBox 56"/>
           <p:cNvSpPr txBox="1"/>
           <p:nvPr/>
         </p:nvSpPr>
         <p:spPr>
           <a:xfrm>
-            <a:off x="5166360" y="5161788"/>
-            <a:ext cx="2148840" cy="534924"/>
+            <a:off x="4389120" y="5161788"/>
+            <a:ext cx="1737360" cy="534924"/>
           </a:xfrm>
           <a:prstGeom prst="rect">
             <a:avLst/>
@@ -5463,14 +5758,14 @@
       </p:sp>
       <p:sp>
         <p:nvSpPr>
-          <p:cNvPr id="51" name="TextBox 50"/>
+          <p:cNvPr id="58" name="TextBox 57"/>
           <p:cNvSpPr txBox="1"/>
           <p:nvPr/>
         </p:nvSpPr>
         <p:spPr>
           <a:xfrm>
-            <a:off x="7406640" y="5161788"/>
-            <a:ext cx="2148840" cy="534924"/>
+            <a:off x="6217920" y="5161788"/>
+            <a:ext cx="1737360" cy="534924"/>
           </a:xfrm>
           <a:prstGeom prst="rect">
             <a:avLst/>
@@ -5505,14 +5800,14 @@
       </p:sp>
       <p:sp>
         <p:nvSpPr>
-          <p:cNvPr id="52" name="TextBox 51"/>
+          <p:cNvPr id="59" name="TextBox 58"/>
           <p:cNvSpPr txBox="1"/>
           <p:nvPr/>
         </p:nvSpPr>
         <p:spPr>
           <a:xfrm>
-            <a:off x="9646920" y="5161788"/>
-            <a:ext cx="2148840" cy="534924"/>
+            <a:off x="8046720" y="5161788"/>
+            <a:ext cx="1737360" cy="534924"/>
           </a:xfrm>
           <a:prstGeom prst="rect">
             <a:avLst/>
@@ -5547,14 +5842,56 @@
       </p:sp>
       <p:sp>
         <p:nvSpPr>
-          <p:cNvPr id="53" name="Rectangle 52"/>
+          <p:cNvPr id="60" name="TextBox 59"/>
+          <p:cNvSpPr txBox="1"/>
+          <p:nvPr/>
+        </p:nvSpPr>
+        <p:spPr>
+          <a:xfrm>
+            <a:off x="9875520" y="5161788"/>
+            <a:ext cx="1737360" cy="534924"/>
+          </a:xfrm>
+          <a:prstGeom prst="rect">
+            <a:avLst/>
+          </a:prstGeom>
+          <a:noFill/>
+        </p:spPr>
+        <p:txBody>
+          <a:bodyPr wrap="square" anchor="ctr">
+            <a:spAutoFit/>
+          </a:bodyPr>
+          <a:lstStyle/>
+          <a:p>
+            <a:pPr algn="ctr">
+              <a:lnSpc>
+                <a:spcPct val="100000"/>
+              </a:lnSpc>
+              <a:spcAft>
+                <a:spcPts val="300"/>
+              </a:spcAft>
+            </a:pPr>
+            <a:r>
+              <a:rPr sz="1150" b="0">
+                <a:solidFill>
+                  <a:srgbClr val="1F2933"/>
+                </a:solidFill>
+                <a:latin typeface="Microsoft JhengHei"/>
+              </a:rPr>
+              <a:t>1×</a:t>
+            </a:r>
+          </a:p>
+        </p:txBody>
+      </p:sp>
+      <p:sp>
+        <p:nvSpPr>
+          <p:cNvPr id="61" name="Rectangle 60"/>
           <p:cNvSpPr/>
           <p:nvPr/>
         </p:nvSpPr>
         <p:spPr>
           <a:xfrm>
             <a:off x="502920" y="5696712"/>
-            <a:ext cx="11338560" cy="534924"/>
+            <a:ext cx="11155680" cy="534924"/>
           </a:xfrm>
           <a:prstGeom prst="rect">
             <a:avLst/>
@@ -5593,14 +5930,14 @@
       </p:sp>
       <p:sp>
         <p:nvSpPr>
-          <p:cNvPr id="54" name="TextBox 53"/>
+          <p:cNvPr id="62" name="TextBox 61"/>
           <p:cNvSpPr txBox="1"/>
           <p:nvPr/>
         </p:nvSpPr>
         <p:spPr>
           <a:xfrm>
             <a:off x="548640" y="5696712"/>
-            <a:ext cx="2286000" cy="534924"/>
+            <a:ext cx="1920240" cy="534924"/>
           </a:xfrm>
           <a:prstGeom prst="rect">
             <a:avLst/>
@@ -5635,14 +5972,14 @@
       </p:sp>
       <p:sp>
         <p:nvSpPr>
-          <p:cNvPr id="55" name="TextBox 54"/>
+          <p:cNvPr id="63" name="TextBox 62"/>
           <p:cNvSpPr txBox="1"/>
           <p:nvPr/>
         </p:nvSpPr>
         <p:spPr>
           <a:xfrm>
-            <a:off x="2926080" y="5696712"/>
-            <a:ext cx="2148840" cy="534924"/>
+            <a:off x="2560320" y="5696712"/>
+            <a:ext cx="1737360" cy="534924"/>
           </a:xfrm>
           <a:prstGeom prst="rect">
             <a:avLst/>
@@ -5677,14 +6014,14 @@
       </p:sp>
       <p:sp>
         <p:nvSpPr>
-          <p:cNvPr id="56" name="TextBox 55"/>
+          <p:cNvPr id="64" name="TextBox 63"/>
           <p:cNvSpPr txBox="1"/>
           <p:nvPr/>
         </p:nvSpPr>
         <p:spPr>
           <a:xfrm>
-            <a:off x="5166360" y="5696712"/>
-            <a:ext cx="2148840" cy="534924"/>
+            <a:off x="4389120" y="5696712"/>
+            <a:ext cx="1737360" cy="534924"/>
           </a:xfrm>
           <a:prstGeom prst="rect">
             <a:avLst/>
@@ -5719,14 +6056,14 @@
       </p:sp>
       <p:sp>
         <p:nvSpPr>
-          <p:cNvPr id="57" name="TextBox 56"/>
+          <p:cNvPr id="65" name="TextBox 64"/>
           <p:cNvSpPr txBox="1"/>
           <p:nvPr/>
         </p:nvSpPr>
         <p:spPr>
           <a:xfrm>
-            <a:off x="7406640" y="5696712"/>
-            <a:ext cx="2148840" cy="534924"/>
+            <a:off x="6217920" y="5696712"/>
+            <a:ext cx="1737360" cy="534924"/>
           </a:xfrm>
           <a:prstGeom prst="rect">
             <a:avLst/>
@@ -5761,14 +6098,14 @@
       </p:sp>
       <p:sp>
         <p:nvSpPr>
-          <p:cNvPr id="58" name="TextBox 57"/>
+          <p:cNvPr id="66" name="TextBox 65"/>
           <p:cNvSpPr txBox="1"/>
           <p:nvPr/>
         </p:nvSpPr>
         <p:spPr>
           <a:xfrm>
-            <a:off x="9646920" y="5696712"/>
-            <a:ext cx="2148840" cy="534924"/>
+            <a:off x="8046720" y="5696712"/>
+            <a:ext cx="1737360" cy="534924"/>
           </a:xfrm>
           <a:prstGeom prst="rect">
             <a:avLst/>
@@ -5803,7 +6140,49 @@
       </p:sp>
       <p:sp>
         <p:nvSpPr>
-          <p:cNvPr id="59" name="TextBox 58"/>
+          <p:cNvPr id="67" name="TextBox 66"/>
+          <p:cNvSpPr txBox="1"/>
+          <p:nvPr/>
+        </p:nvSpPr>
+        <p:spPr>
+          <a:xfrm>
+            <a:off x="9875520" y="5696712"/>
+            <a:ext cx="1737360" cy="534924"/>
+          </a:xfrm>
+          <a:prstGeom prst="rect">
+            <a:avLst/>
+          </a:prstGeom>
+          <a:noFill/>
+        </p:spPr>
+        <p:txBody>
+          <a:bodyPr wrap="square" anchor="ctr">
+            <a:spAutoFit/>
+          </a:bodyPr>
+          <a:lstStyle/>
+          <a:p>
+            <a:pPr algn="ctr">
+              <a:lnSpc>
+                <a:spcPct val="100000"/>
+              </a:lnSpc>
+              <a:spcAft>
+                <a:spcPts val="300"/>
+              </a:spcAft>
+            </a:pPr>
+            <a:r>
+              <a:rPr sz="1150" b="0">
+                <a:solidFill>
+                  <a:srgbClr val="1F2933"/>
+                </a:solidFill>
+                <a:latin typeface="Microsoft JhengHei"/>
+              </a:rPr>
+              <a:t>現行 prod 架構</a:t>
+            </a:r>
+          </a:p>
+        </p:txBody>
+      </p:sp>
+      <p:sp>
+        <p:nvSpPr>
+          <p:cNvPr id="68" name="TextBox 67"/>
           <p:cNvSpPr txBox="1"/>
           <p:nvPr/>
         </p:nvSpPr>
@@ -5873,7 +6252,7 @@
       </p:sp>
       <p:sp>
         <p:nvSpPr>
-          <p:cNvPr id="60" name="TextBox 59"/>
+          <p:cNvPr id="69" name="TextBox 68"/>
           <p:cNvSpPr txBox="1"/>
           <p:nvPr/>
         </p:nvSpPr>
@@ -5915,7 +6294,7 @@
       </p:sp>
       <p:sp>
         <p:nvSpPr>
-          <p:cNvPr id="61" name="TextBox 60"/>
+          <p:cNvPr id="70" name="TextBox 69"/>
           <p:cNvSpPr txBox="1"/>
           <p:nvPr/>
         </p:nvSpPr>
@@ -22144,7 +22523,7 @@
             <a:avLst/>
           </a:prstGeom>
           <a:solidFill>
-            <a:srgbClr val="1D4ED8"/>
+            <a:srgbClr val="067647"/>
           </a:solidFill>
           <a:ln>
             <a:noFill/>
@@ -22210,7 +22589,7 @@
                 </a:solidFill>
                 <a:latin typeface="Microsoft JhengHei"/>
               </a:rPr>
-              <a:t>結論</a:t>
+              <a:t>每案結果 · ROUNDS</a:t>
             </a:r>
           </a:p>
           <a:p>
@@ -22229,7 +22608,7 @@
                 </a:solidFill>
                 <a:latin typeface="Microsoft JhengHei"/>
               </a:rPr>
-              <a:t>定位與建議</a:t>
+              <a:t>GLM-5.2 @ Multi-Agent P0  （第 5 種：新架構）</a:t>
             </a:r>
           </a:p>
         </p:txBody>
@@ -22242,8 +22621,8 @@
         </p:nvSpPr>
         <p:spPr>
           <a:xfrm>
-            <a:off x="502920" y="1371600"/>
-            <a:ext cx="11183112" cy="1024128"/>
+            <a:off x="502920" y="1325880"/>
+            <a:ext cx="3337560" cy="4709160"/>
           </a:xfrm>
           <a:prstGeom prst="rect">
             <a:avLst/>
@@ -22288,6 +22667,4034 @@
         </p:nvSpPr>
         <p:spPr>
           <a:xfrm>
+            <a:off x="713232" y="1536192"/>
+            <a:ext cx="2926080" cy="4297680"/>
+          </a:xfrm>
+          <a:prstGeom prst="rect">
+            <a:avLst/>
+          </a:prstGeom>
+          <a:noFill/>
+        </p:spPr>
+        <p:txBody>
+          <a:bodyPr wrap="square" anchor="t">
+            <a:spAutoFit/>
+          </a:bodyPr>
+          <a:lstStyle/>
+          <a:p>
+            <a:pPr algn="l">
+              <a:lnSpc>
+                <a:spcPct val="100000"/>
+              </a:lnSpc>
+              <a:spcAft>
+                <a:spcPts val="800"/>
+              </a:spcAft>
+            </a:pPr>
+            <a:r>
+              <a:rPr sz="1300" b="1">
+                <a:solidFill>
+                  <a:srgbClr val="067647"/>
+                </a:solidFill>
+                <a:latin typeface="Microsoft JhengHei"/>
+              </a:rPr>
+              <a:t>關鍵指標</a:t>
+            </a:r>
+          </a:p>
+          <a:p>
+            <a:pPr algn="l">
+              <a:lnSpc>
+                <a:spcPct val="100000"/>
+              </a:lnSpc>
+              <a:spcAft>
+                <a:spcPts val="800"/>
+              </a:spcAft>
+            </a:pPr>
+            <a:r>
+              <a:rPr sz="1200" b="0">
+                <a:solidFill>
+                  <a:srgbClr val="667085"/>
+                </a:solidFill>
+                <a:latin typeface="Microsoft JhengHei"/>
+              </a:rPr>
+              <a:t>嚴格  </a:t>
+            </a:r>
+            <a:r>
+              <a:rPr sz="1500" b="1">
+                <a:solidFill>
+                  <a:srgbClr val="101828"/>
+                </a:solidFill>
+                <a:latin typeface="Microsoft JhengHei"/>
+              </a:rPr>
+              <a:t>17/17</a:t>
+            </a:r>
+          </a:p>
+          <a:p>
+            <a:pPr algn="l">
+              <a:lnSpc>
+                <a:spcPct val="100000"/>
+              </a:lnSpc>
+              <a:spcAft>
+                <a:spcPts val="800"/>
+              </a:spcAft>
+            </a:pPr>
+            <a:r>
+              <a:rPr sz="1200" b="0">
+                <a:solidFill>
+                  <a:srgbClr val="667085"/>
+                </a:solidFill>
+                <a:latin typeface="Microsoft JhengHei"/>
+              </a:rPr>
+              <a:t>寬鬆  </a:t>
+            </a:r>
+            <a:r>
+              <a:rPr sz="1500" b="1">
+                <a:solidFill>
+                  <a:srgbClr val="101828"/>
+                </a:solidFill>
+                <a:latin typeface="Microsoft JhengHei"/>
+              </a:rPr>
+              <a:t>17/17</a:t>
+            </a:r>
+          </a:p>
+          <a:p>
+            <a:pPr algn="l">
+              <a:lnSpc>
+                <a:spcPct val="100000"/>
+              </a:lnSpc>
+              <a:spcAft>
+                <a:spcPts val="800"/>
+              </a:spcAft>
+            </a:pPr>
+            <a:r>
+              <a:rPr sz="1200" b="0">
+                <a:solidFill>
+                  <a:srgbClr val="667085"/>
+                </a:solidFill>
+                <a:latin typeface="Microsoft JhengHei"/>
+              </a:rPr>
+              <a:t>跑完  </a:t>
+            </a:r>
+            <a:r>
+              <a:rPr sz="1500" b="1">
+                <a:solidFill>
+                  <a:srgbClr val="101828"/>
+                </a:solidFill>
+                <a:latin typeface="Microsoft JhengHei"/>
+              </a:rPr>
+              <a:t>22.3 min</a:t>
+            </a:r>
+          </a:p>
+          <a:p>
+            <a:pPr algn="l">
+              <a:lnSpc>
+                <a:spcPct val="100000"/>
+              </a:lnSpc>
+              <a:spcAft>
+                <a:spcPts val="800"/>
+              </a:spcAft>
+            </a:pPr>
+            <a:r>
+              <a:rPr sz="1200" b="0">
+                <a:solidFill>
+                  <a:srgbClr val="667085"/>
+                </a:solidFill>
+                <a:latin typeface="Microsoft JhengHei"/>
+              </a:rPr>
+              <a:t>round  </a:t>
+            </a:r>
+            <a:r>
+              <a:rPr sz="1500" b="1">
+                <a:solidFill>
+                  <a:srgbClr val="101828"/>
+                </a:solidFill>
+                <a:latin typeface="Microsoft JhengHei"/>
+              </a:rPr>
+              <a:t>237</a:t>
+            </a:r>
+          </a:p>
+          <a:p>
+            <a:pPr algn="l">
+              <a:lnSpc>
+                <a:spcPct val="100000"/>
+              </a:lnSpc>
+              <a:spcAft>
+                <a:spcPts val="800"/>
+              </a:spcAft>
+            </a:pPr>
+            <a:r>
+              <a:rPr sz="1200" b="0">
+                <a:solidFill>
+                  <a:srgbClr val="667085"/>
+                </a:solidFill>
+                <a:latin typeface="Microsoft JhengHei"/>
+              </a:rPr>
+              <a:t>cache  </a:t>
+            </a:r>
+            <a:r>
+              <a:rPr sz="1500" b="1">
+                <a:solidFill>
+                  <a:srgbClr val="101828"/>
+                </a:solidFill>
+                <a:latin typeface="Microsoft JhengHei"/>
+              </a:rPr>
+              <a:t>54.7%</a:t>
+            </a:r>
+          </a:p>
+          <a:p>
+            <a:pPr algn="l">
+              <a:lnSpc>
+                <a:spcPct val="100000"/>
+              </a:lnSpc>
+              <a:spcAft>
+                <a:spcPts val="800"/>
+              </a:spcAft>
+            </a:pPr>
+            <a:r>
+              <a:rPr sz="1200" b="0">
+                <a:solidFill>
+                  <a:srgbClr val="667085"/>
+                </a:solidFill>
+                <a:latin typeface="Microsoft JhengHei"/>
+              </a:rPr>
+              <a:t>成本  </a:t>
+            </a:r>
+            <a:r>
+              <a:rPr sz="1500" b="1">
+                <a:solidFill>
+                  <a:srgbClr val="101828"/>
+                </a:solidFill>
+                <a:latin typeface="Microsoft JhengHei"/>
+              </a:rPr>
+              <a:t>~$1.3</a:t>
+            </a:r>
+          </a:p>
+        </p:txBody>
+      </p:sp>
+      <p:sp>
+        <p:nvSpPr>
+          <p:cNvPr id="7" name="Rectangle 6"/>
+          <p:cNvSpPr/>
+          <p:nvPr/>
+        </p:nvSpPr>
+        <p:spPr>
+          <a:xfrm>
+            <a:off x="713232" y="5074920"/>
+            <a:ext cx="2926080" cy="457200"/>
+          </a:xfrm>
+          <a:prstGeom prst="rect">
+            <a:avLst/>
+          </a:prstGeom>
+          <a:solidFill>
+            <a:srgbClr val="067647"/>
+          </a:solidFill>
+          <a:ln w="9525">
+            <a:solidFill>
+              <a:srgbClr val="067647"/>
+            </a:solidFill>
+          </a:ln>
+          <a:effectLst/>
+        </p:spPr>
+        <p:style>
+          <a:lnRef idx="1">
+            <a:schemeClr val="accent1"/>
+          </a:lnRef>
+          <a:fillRef idx="3">
+            <a:schemeClr val="accent1"/>
+          </a:fillRef>
+          <a:effectRef idx="2">
+            <a:schemeClr val="accent1"/>
+          </a:effectRef>
+          <a:fontRef idx="minor">
+            <a:schemeClr val="lt1"/>
+          </a:fontRef>
+        </p:style>
+        <p:txBody>
+          <a:bodyPr rtlCol="0" anchor="ctr" wrap="square"/>
+          <a:lstStyle/>
+          <a:p>
+            <a:pPr algn="ctr">
+              <a:lnSpc>
+                <a:spcPct val="100000"/>
+              </a:lnSpc>
+              <a:spcAft>
+                <a:spcPts val="300"/>
+              </a:spcAft>
+            </a:pPr>
+            <a:r>
+              <a:rPr sz="1200" b="1">
+                <a:solidFill>
+                  <a:srgbClr val="FFFFFF"/>
+                </a:solidFill>
+                <a:latin typeface="Microsoft JhengHei"/>
+              </a:rPr>
+              <a:t>現行 prod 架構 [best]</a:t>
+            </a:r>
+          </a:p>
+        </p:txBody>
+      </p:sp>
+      <p:sp>
+        <p:nvSpPr>
+          <p:cNvPr id="8" name="TextBox 7"/>
+          <p:cNvSpPr txBox="1"/>
+          <p:nvPr/>
+        </p:nvSpPr>
+        <p:spPr>
+          <a:xfrm>
+            <a:off x="713232" y="5559552"/>
+            <a:ext cx="2926080" cy="457200"/>
+          </a:xfrm>
+          <a:prstGeom prst="rect">
+            <a:avLst/>
+          </a:prstGeom>
+          <a:noFill/>
+        </p:spPr>
+        <p:txBody>
+          <a:bodyPr wrap="square" anchor="t">
+            <a:spAutoFit/>
+          </a:bodyPr>
+          <a:lstStyle/>
+          <a:p>
+            <a:pPr algn="l">
+              <a:lnSpc>
+                <a:spcPct val="105000"/>
+              </a:lnSpc>
+              <a:spcAft>
+                <a:spcPts val="300"/>
+              </a:spcAft>
+            </a:pPr>
+            <a:r>
+              <a:rPr sz="1050" b="0">
+                <a:solidFill>
+                  <a:srgbClr val="1F2933"/>
+                </a:solidFill>
+                <a:latin typeface="Microsoft JhengHei"/>
+              </a:rPr>
+              <a:t>同一顆 GLM-5.2,跑在 Planner/Builder/Repair 重構後 builder(2026-07-02)。17/17 在 GLM 12-15 變異帶上緣;嚴謹解讀=零回歸,非架構提升品質。</a:t>
+            </a:r>
+          </a:p>
+        </p:txBody>
+      </p:sp>
+      <p:sp>
+        <p:nvSpPr>
+          <p:cNvPr id="9" name="Rectangle 8"/>
+          <p:cNvSpPr/>
+          <p:nvPr/>
+        </p:nvSpPr>
+        <p:spPr>
+          <a:xfrm>
+            <a:off x="4069080" y="1371600"/>
+            <a:ext cx="3703320" cy="507492"/>
+          </a:xfrm>
+          <a:prstGeom prst="rect">
+            <a:avLst/>
+          </a:prstGeom>
+          <a:solidFill>
+            <a:srgbClr val="F8FAFC"/>
+          </a:solidFill>
+          <a:ln w="6350">
+            <a:solidFill>
+              <a:srgbClr val="E4E7EC"/>
+            </a:solidFill>
+          </a:ln>
+          <a:effectLst/>
+        </p:spPr>
+        <p:style>
+          <a:lnRef idx="1">
+            <a:schemeClr val="accent1"/>
+          </a:lnRef>
+          <a:fillRef idx="3">
+            <a:schemeClr val="accent1"/>
+          </a:fillRef>
+          <a:effectRef idx="2">
+            <a:schemeClr val="accent1"/>
+          </a:effectRef>
+          <a:fontRef idx="minor">
+            <a:schemeClr val="lt1"/>
+          </a:fontRef>
+        </p:style>
+        <p:txBody>
+          <a:bodyPr rtlCol="0" anchor="ctr"/>
+          <a:lstStyle/>
+          <a:p>
+            <a:pPr algn="ctr"/>
+          </a:p>
+        </p:txBody>
+      </p:sp>
+      <p:sp>
+        <p:nvSpPr>
+          <p:cNvPr id="10" name="TextBox 9"/>
+          <p:cNvSpPr txBox="1"/>
+          <p:nvPr/>
+        </p:nvSpPr>
+        <p:spPr>
+          <a:xfrm>
+            <a:off x="4142232" y="1371600"/>
+            <a:ext cx="2011680" cy="507492"/>
+          </a:xfrm>
+          <a:prstGeom prst="rect">
+            <a:avLst/>
+          </a:prstGeom>
+          <a:noFill/>
+        </p:spPr>
+        <p:txBody>
+          <a:bodyPr wrap="square" anchor="ctr">
+            <a:spAutoFit/>
+          </a:bodyPr>
+          <a:lstStyle/>
+          <a:p>
+            <a:pPr algn="l">
+              <a:lnSpc>
+                <a:spcPct val="100000"/>
+              </a:lnSpc>
+              <a:spcAft>
+                <a:spcPts val="300"/>
+              </a:spcAft>
+            </a:pPr>
+            <a:r>
+              <a:rPr sz="900" b="1">
+                <a:solidFill>
+                  <a:srgbClr val="667085"/>
+                </a:solidFill>
+                <a:latin typeface="Consolas"/>
+              </a:rPr>
+              <a:t> 1 </a:t>
+            </a:r>
+            <a:r>
+              <a:rPr sz="1050" b="0">
+                <a:solidFill>
+                  <a:srgbClr val="1F2933"/>
+                </a:solidFill>
+                <a:latin typeface="Microsoft JhengHei"/>
+              </a:rPr>
+              <a:t>spc-trend</a:t>
+            </a:r>
+          </a:p>
+        </p:txBody>
+      </p:sp>
+      <p:sp>
+        <p:nvSpPr>
+          <p:cNvPr id="11" name="TextBox 10"/>
+          <p:cNvSpPr txBox="1"/>
+          <p:nvPr/>
+        </p:nvSpPr>
+        <p:spPr>
+          <a:xfrm>
+            <a:off x="5943600" y="1371600"/>
+            <a:ext cx="1005840" cy="507492"/>
+          </a:xfrm>
+          <a:prstGeom prst="rect">
+            <a:avLst/>
+          </a:prstGeom>
+          <a:noFill/>
+        </p:spPr>
+        <p:txBody>
+          <a:bodyPr wrap="square" anchor="ctr">
+            <a:spAutoFit/>
+          </a:bodyPr>
+          <a:lstStyle/>
+          <a:p>
+            <a:pPr algn="r">
+              <a:lnSpc>
+                <a:spcPct val="100000"/>
+              </a:lnSpc>
+              <a:spcAft>
+                <a:spcPts val="300"/>
+              </a:spcAft>
+            </a:pPr>
+            <a:r>
+              <a:rPr sz="950" b="0">
+                <a:solidFill>
+                  <a:srgbClr val="667085"/>
+                </a:solidFill>
+                <a:latin typeface="Consolas"/>
+              </a:rPr>
+              <a:t>6r · 25s</a:t>
+            </a:r>
+          </a:p>
+        </p:txBody>
+      </p:sp>
+      <p:sp>
+        <p:nvSpPr>
+          <p:cNvPr id="12" name="Rectangle 11"/>
+          <p:cNvSpPr/>
+          <p:nvPr/>
+        </p:nvSpPr>
+        <p:spPr>
+          <a:xfrm>
+            <a:off x="7168896" y="1481328"/>
+            <a:ext cx="502920" cy="283464"/>
+          </a:xfrm>
+          <a:prstGeom prst="rect">
+            <a:avLst/>
+          </a:prstGeom>
+          <a:solidFill>
+            <a:srgbClr val="ECFDF3"/>
+          </a:solidFill>
+          <a:ln w="9525">
+            <a:solidFill>
+              <a:srgbClr val="A6F4C5"/>
+            </a:solidFill>
+          </a:ln>
+          <a:effectLst/>
+        </p:spPr>
+        <p:style>
+          <a:lnRef idx="1">
+            <a:schemeClr val="accent1"/>
+          </a:lnRef>
+          <a:fillRef idx="3">
+            <a:schemeClr val="accent1"/>
+          </a:fillRef>
+          <a:effectRef idx="2">
+            <a:schemeClr val="accent1"/>
+          </a:effectRef>
+          <a:fontRef idx="minor">
+            <a:schemeClr val="lt1"/>
+          </a:fontRef>
+        </p:style>
+        <p:txBody>
+          <a:bodyPr rtlCol="0" anchor="ctr" wrap="square"/>
+          <a:lstStyle/>
+          <a:p>
+            <a:pPr algn="ctr">
+              <a:lnSpc>
+                <a:spcPct val="100000"/>
+              </a:lnSpc>
+              <a:spcAft>
+                <a:spcPts val="300"/>
+              </a:spcAft>
+            </a:pPr>
+            <a:r>
+              <a:rPr sz="900" b="1">
+                <a:solidFill>
+                  <a:srgbClr val="067647"/>
+                </a:solidFill>
+                <a:latin typeface="Microsoft JhengHei"/>
+              </a:rPr>
+              <a:t>ok</a:t>
+            </a:r>
+          </a:p>
+        </p:txBody>
+      </p:sp>
+      <p:sp>
+        <p:nvSpPr>
+          <p:cNvPr id="13" name="Rectangle 12"/>
+          <p:cNvSpPr/>
+          <p:nvPr/>
+        </p:nvSpPr>
+        <p:spPr>
+          <a:xfrm>
+            <a:off x="4069080" y="1879092"/>
+            <a:ext cx="3703320" cy="507492"/>
+          </a:xfrm>
+          <a:prstGeom prst="rect">
+            <a:avLst/>
+          </a:prstGeom>
+          <a:solidFill>
+            <a:srgbClr val="FFFFFF"/>
+          </a:solidFill>
+          <a:ln w="6350">
+            <a:solidFill>
+              <a:srgbClr val="E4E7EC"/>
+            </a:solidFill>
+          </a:ln>
+          <a:effectLst/>
+        </p:spPr>
+        <p:style>
+          <a:lnRef idx="1">
+            <a:schemeClr val="accent1"/>
+          </a:lnRef>
+          <a:fillRef idx="3">
+            <a:schemeClr val="accent1"/>
+          </a:fillRef>
+          <a:effectRef idx="2">
+            <a:schemeClr val="accent1"/>
+          </a:effectRef>
+          <a:fontRef idx="minor">
+            <a:schemeClr val="lt1"/>
+          </a:fontRef>
+        </p:style>
+        <p:txBody>
+          <a:bodyPr rtlCol="0" anchor="ctr"/>
+          <a:lstStyle/>
+          <a:p>
+            <a:pPr algn="ctr"/>
+          </a:p>
+        </p:txBody>
+      </p:sp>
+      <p:sp>
+        <p:nvSpPr>
+          <p:cNvPr id="14" name="TextBox 13"/>
+          <p:cNvSpPr txBox="1"/>
+          <p:nvPr/>
+        </p:nvSpPr>
+        <p:spPr>
+          <a:xfrm>
+            <a:off x="4142232" y="1879092"/>
+            <a:ext cx="2011680" cy="507492"/>
+          </a:xfrm>
+          <a:prstGeom prst="rect">
+            <a:avLst/>
+          </a:prstGeom>
+          <a:noFill/>
+        </p:spPr>
+        <p:txBody>
+          <a:bodyPr wrap="square" anchor="ctr">
+            <a:spAutoFit/>
+          </a:bodyPr>
+          <a:lstStyle/>
+          <a:p>
+            <a:pPr algn="l">
+              <a:lnSpc>
+                <a:spcPct val="100000"/>
+              </a:lnSpc>
+              <a:spcAft>
+                <a:spcPts val="300"/>
+              </a:spcAft>
+            </a:pPr>
+            <a:r>
+              <a:rPr sz="900" b="1">
+                <a:solidFill>
+                  <a:srgbClr val="667085"/>
+                </a:solidFill>
+                <a:latin typeface="Consolas"/>
+              </a:rPr>
+              <a:t> 2 </a:t>
+            </a:r>
+            <a:r>
+              <a:rPr sz="1050" b="0">
+                <a:solidFill>
+                  <a:srgbClr val="1F2933"/>
+                </a:solidFill>
+                <a:latin typeface="Microsoft JhengHei"/>
+              </a:rPr>
+              <a:t>spc-ooc</a:t>
+            </a:r>
+          </a:p>
+        </p:txBody>
+      </p:sp>
+      <p:sp>
+        <p:nvSpPr>
+          <p:cNvPr id="15" name="TextBox 14"/>
+          <p:cNvSpPr txBox="1"/>
+          <p:nvPr/>
+        </p:nvSpPr>
+        <p:spPr>
+          <a:xfrm>
+            <a:off x="5943600" y="1879092"/>
+            <a:ext cx="1005840" cy="507492"/>
+          </a:xfrm>
+          <a:prstGeom prst="rect">
+            <a:avLst/>
+          </a:prstGeom>
+          <a:noFill/>
+        </p:spPr>
+        <p:txBody>
+          <a:bodyPr wrap="square" anchor="ctr">
+            <a:spAutoFit/>
+          </a:bodyPr>
+          <a:lstStyle/>
+          <a:p>
+            <a:pPr algn="r">
+              <a:lnSpc>
+                <a:spcPct val="100000"/>
+              </a:lnSpc>
+              <a:spcAft>
+                <a:spcPts val="300"/>
+              </a:spcAft>
+            </a:pPr>
+            <a:r>
+              <a:rPr sz="950" b="0">
+                <a:solidFill>
+                  <a:srgbClr val="667085"/>
+                </a:solidFill>
+                <a:latin typeface="Consolas"/>
+              </a:rPr>
+              <a:t>30r · 116s</a:t>
+            </a:r>
+          </a:p>
+        </p:txBody>
+      </p:sp>
+      <p:sp>
+        <p:nvSpPr>
+          <p:cNvPr id="16" name="Rectangle 15"/>
+          <p:cNvSpPr/>
+          <p:nvPr/>
+        </p:nvSpPr>
+        <p:spPr>
+          <a:xfrm>
+            <a:off x="7168896" y="1988820"/>
+            <a:ext cx="502920" cy="283464"/>
+          </a:xfrm>
+          <a:prstGeom prst="rect">
+            <a:avLst/>
+          </a:prstGeom>
+          <a:solidFill>
+            <a:srgbClr val="ECFDF3"/>
+          </a:solidFill>
+          <a:ln w="9525">
+            <a:solidFill>
+              <a:srgbClr val="A6F4C5"/>
+            </a:solidFill>
+          </a:ln>
+          <a:effectLst/>
+        </p:spPr>
+        <p:style>
+          <a:lnRef idx="1">
+            <a:schemeClr val="accent1"/>
+          </a:lnRef>
+          <a:fillRef idx="3">
+            <a:schemeClr val="accent1"/>
+          </a:fillRef>
+          <a:effectRef idx="2">
+            <a:schemeClr val="accent1"/>
+          </a:effectRef>
+          <a:fontRef idx="minor">
+            <a:schemeClr val="lt1"/>
+          </a:fontRef>
+        </p:style>
+        <p:txBody>
+          <a:bodyPr rtlCol="0" anchor="ctr" wrap="square"/>
+          <a:lstStyle/>
+          <a:p>
+            <a:pPr algn="ctr">
+              <a:lnSpc>
+                <a:spcPct val="100000"/>
+              </a:lnSpc>
+              <a:spcAft>
+                <a:spcPts val="300"/>
+              </a:spcAft>
+            </a:pPr>
+            <a:r>
+              <a:rPr sz="900" b="1">
+                <a:solidFill>
+                  <a:srgbClr val="067647"/>
+                </a:solidFill>
+                <a:latin typeface="Microsoft JhengHei"/>
+              </a:rPr>
+              <a:t>ok</a:t>
+            </a:r>
+          </a:p>
+        </p:txBody>
+      </p:sp>
+      <p:sp>
+        <p:nvSpPr>
+          <p:cNvPr id="17" name="Rectangle 16"/>
+          <p:cNvSpPr/>
+          <p:nvPr/>
+        </p:nvSpPr>
+        <p:spPr>
+          <a:xfrm>
+            <a:off x="4069080" y="2386584"/>
+            <a:ext cx="3703320" cy="507492"/>
+          </a:xfrm>
+          <a:prstGeom prst="rect">
+            <a:avLst/>
+          </a:prstGeom>
+          <a:solidFill>
+            <a:srgbClr val="F8FAFC"/>
+          </a:solidFill>
+          <a:ln w="6350">
+            <a:solidFill>
+              <a:srgbClr val="E4E7EC"/>
+            </a:solidFill>
+          </a:ln>
+          <a:effectLst/>
+        </p:spPr>
+        <p:style>
+          <a:lnRef idx="1">
+            <a:schemeClr val="accent1"/>
+          </a:lnRef>
+          <a:fillRef idx="3">
+            <a:schemeClr val="accent1"/>
+          </a:fillRef>
+          <a:effectRef idx="2">
+            <a:schemeClr val="accent1"/>
+          </a:effectRef>
+          <a:fontRef idx="minor">
+            <a:schemeClr val="lt1"/>
+          </a:fontRef>
+        </p:style>
+        <p:txBody>
+          <a:bodyPr rtlCol="0" anchor="ctr"/>
+          <a:lstStyle/>
+          <a:p>
+            <a:pPr algn="ctr"/>
+          </a:p>
+        </p:txBody>
+      </p:sp>
+      <p:sp>
+        <p:nvSpPr>
+          <p:cNvPr id="18" name="TextBox 17"/>
+          <p:cNvSpPr txBox="1"/>
+          <p:nvPr/>
+        </p:nvSpPr>
+        <p:spPr>
+          <a:xfrm>
+            <a:off x="4142232" y="2386584"/>
+            <a:ext cx="2011680" cy="507492"/>
+          </a:xfrm>
+          <a:prstGeom prst="rect">
+            <a:avLst/>
+          </a:prstGeom>
+          <a:noFill/>
+        </p:spPr>
+        <p:txBody>
+          <a:bodyPr wrap="square" anchor="ctr">
+            <a:spAutoFit/>
+          </a:bodyPr>
+          <a:lstStyle/>
+          <a:p>
+            <a:pPr algn="l">
+              <a:lnSpc>
+                <a:spcPct val="100000"/>
+              </a:lnSpc>
+              <a:spcAft>
+                <a:spcPts val="300"/>
+              </a:spcAft>
+            </a:pPr>
+            <a:r>
+              <a:rPr sz="900" b="1">
+                <a:solidFill>
+                  <a:srgbClr val="667085"/>
+                </a:solidFill>
+                <a:latin typeface="Consolas"/>
+              </a:rPr>
+              <a:t> 3 </a:t>
+            </a:r>
+            <a:r>
+              <a:rPr sz="1050" b="0">
+                <a:solidFill>
+                  <a:srgbClr val="1F2933"/>
+                </a:solidFill>
+                <a:latin typeface="Microsoft JhengHei"/>
+              </a:rPr>
+              <a:t>spc-cpk</a:t>
+            </a:r>
+          </a:p>
+        </p:txBody>
+      </p:sp>
+      <p:sp>
+        <p:nvSpPr>
+          <p:cNvPr id="19" name="TextBox 18"/>
+          <p:cNvSpPr txBox="1"/>
+          <p:nvPr/>
+        </p:nvSpPr>
+        <p:spPr>
+          <a:xfrm>
+            <a:off x="5943600" y="2386584"/>
+            <a:ext cx="1005840" cy="507492"/>
+          </a:xfrm>
+          <a:prstGeom prst="rect">
+            <a:avLst/>
+          </a:prstGeom>
+          <a:noFill/>
+        </p:spPr>
+        <p:txBody>
+          <a:bodyPr wrap="square" anchor="ctr">
+            <a:spAutoFit/>
+          </a:bodyPr>
+          <a:lstStyle/>
+          <a:p>
+            <a:pPr algn="r">
+              <a:lnSpc>
+                <a:spcPct val="100000"/>
+              </a:lnSpc>
+              <a:spcAft>
+                <a:spcPts val="300"/>
+              </a:spcAft>
+            </a:pPr>
+            <a:r>
+              <a:rPr sz="950" b="0">
+                <a:solidFill>
+                  <a:srgbClr val="667085"/>
+                </a:solidFill>
+                <a:latin typeface="Consolas"/>
+              </a:rPr>
+              <a:t>34r · 284s</a:t>
+            </a:r>
+          </a:p>
+        </p:txBody>
+      </p:sp>
+      <p:sp>
+        <p:nvSpPr>
+          <p:cNvPr id="20" name="Rectangle 19"/>
+          <p:cNvSpPr/>
+          <p:nvPr/>
+        </p:nvSpPr>
+        <p:spPr>
+          <a:xfrm>
+            <a:off x="7168896" y="2496312"/>
+            <a:ext cx="502920" cy="283464"/>
+          </a:xfrm>
+          <a:prstGeom prst="rect">
+            <a:avLst/>
+          </a:prstGeom>
+          <a:solidFill>
+            <a:srgbClr val="ECFDF3"/>
+          </a:solidFill>
+          <a:ln w="9525">
+            <a:solidFill>
+              <a:srgbClr val="A6F4C5"/>
+            </a:solidFill>
+          </a:ln>
+          <a:effectLst/>
+        </p:spPr>
+        <p:style>
+          <a:lnRef idx="1">
+            <a:schemeClr val="accent1"/>
+          </a:lnRef>
+          <a:fillRef idx="3">
+            <a:schemeClr val="accent1"/>
+          </a:fillRef>
+          <a:effectRef idx="2">
+            <a:schemeClr val="accent1"/>
+          </a:effectRef>
+          <a:fontRef idx="minor">
+            <a:schemeClr val="lt1"/>
+          </a:fontRef>
+        </p:style>
+        <p:txBody>
+          <a:bodyPr rtlCol="0" anchor="ctr" wrap="square"/>
+          <a:lstStyle/>
+          <a:p>
+            <a:pPr algn="ctr">
+              <a:lnSpc>
+                <a:spcPct val="100000"/>
+              </a:lnSpc>
+              <a:spcAft>
+                <a:spcPts val="300"/>
+              </a:spcAft>
+            </a:pPr>
+            <a:r>
+              <a:rPr sz="900" b="1">
+                <a:solidFill>
+                  <a:srgbClr val="067647"/>
+                </a:solidFill>
+                <a:latin typeface="Microsoft JhengHei"/>
+              </a:rPr>
+              <a:t>ok</a:t>
+            </a:r>
+          </a:p>
+        </p:txBody>
+      </p:sp>
+      <p:sp>
+        <p:nvSpPr>
+          <p:cNvPr id="21" name="Rectangle 20"/>
+          <p:cNvSpPr/>
+          <p:nvPr/>
+        </p:nvSpPr>
+        <p:spPr>
+          <a:xfrm>
+            <a:off x="4069080" y="2894076"/>
+            <a:ext cx="3703320" cy="507492"/>
+          </a:xfrm>
+          <a:prstGeom prst="rect">
+            <a:avLst/>
+          </a:prstGeom>
+          <a:solidFill>
+            <a:srgbClr val="FFFFFF"/>
+          </a:solidFill>
+          <a:ln w="6350">
+            <a:solidFill>
+              <a:srgbClr val="E4E7EC"/>
+            </a:solidFill>
+          </a:ln>
+          <a:effectLst/>
+        </p:spPr>
+        <p:style>
+          <a:lnRef idx="1">
+            <a:schemeClr val="accent1"/>
+          </a:lnRef>
+          <a:fillRef idx="3">
+            <a:schemeClr val="accent1"/>
+          </a:fillRef>
+          <a:effectRef idx="2">
+            <a:schemeClr val="accent1"/>
+          </a:effectRef>
+          <a:fontRef idx="minor">
+            <a:schemeClr val="lt1"/>
+          </a:fontRef>
+        </p:style>
+        <p:txBody>
+          <a:bodyPr rtlCol="0" anchor="ctr"/>
+          <a:lstStyle/>
+          <a:p>
+            <a:pPr algn="ctr"/>
+          </a:p>
+        </p:txBody>
+      </p:sp>
+      <p:sp>
+        <p:nvSpPr>
+          <p:cNvPr id="22" name="TextBox 21"/>
+          <p:cNvSpPr txBox="1"/>
+          <p:nvPr/>
+        </p:nvSpPr>
+        <p:spPr>
+          <a:xfrm>
+            <a:off x="4142232" y="2894076"/>
+            <a:ext cx="2011680" cy="507492"/>
+          </a:xfrm>
+          <a:prstGeom prst="rect">
+            <a:avLst/>
+          </a:prstGeom>
+          <a:noFill/>
+        </p:spPr>
+        <p:txBody>
+          <a:bodyPr wrap="square" anchor="ctr">
+            <a:spAutoFit/>
+          </a:bodyPr>
+          <a:lstStyle/>
+          <a:p>
+            <a:pPr algn="l">
+              <a:lnSpc>
+                <a:spcPct val="100000"/>
+              </a:lnSpc>
+              <a:spcAft>
+                <a:spcPts val="300"/>
+              </a:spcAft>
+            </a:pPr>
+            <a:r>
+              <a:rPr sz="900" b="1">
+                <a:solidFill>
+                  <a:srgbClr val="667085"/>
+                </a:solidFill>
+                <a:latin typeface="Consolas"/>
+              </a:rPr>
+              <a:t> 4 </a:t>
+            </a:r>
+            <a:r>
+              <a:rPr sz="1050" b="0">
+                <a:solidFill>
+                  <a:srgbClr val="1F2933"/>
+                </a:solidFill>
+                <a:latin typeface="Microsoft JhengHei"/>
+              </a:rPr>
+              <a:t>spc-multi-tool</a:t>
+            </a:r>
+          </a:p>
+        </p:txBody>
+      </p:sp>
+      <p:sp>
+        <p:nvSpPr>
+          <p:cNvPr id="23" name="TextBox 22"/>
+          <p:cNvSpPr txBox="1"/>
+          <p:nvPr/>
+        </p:nvSpPr>
+        <p:spPr>
+          <a:xfrm>
+            <a:off x="5943600" y="2894076"/>
+            <a:ext cx="1005840" cy="507492"/>
+          </a:xfrm>
+          <a:prstGeom prst="rect">
+            <a:avLst/>
+          </a:prstGeom>
+          <a:noFill/>
+        </p:spPr>
+        <p:txBody>
+          <a:bodyPr wrap="square" anchor="ctr">
+            <a:spAutoFit/>
+          </a:bodyPr>
+          <a:lstStyle/>
+          <a:p>
+            <a:pPr algn="r">
+              <a:lnSpc>
+                <a:spcPct val="100000"/>
+              </a:lnSpc>
+              <a:spcAft>
+                <a:spcPts val="300"/>
+              </a:spcAft>
+            </a:pPr>
+            <a:r>
+              <a:rPr sz="950" b="0">
+                <a:solidFill>
+                  <a:srgbClr val="667085"/>
+                </a:solidFill>
+                <a:latin typeface="Consolas"/>
+              </a:rPr>
+              <a:t>12r · 50s</a:t>
+            </a:r>
+          </a:p>
+        </p:txBody>
+      </p:sp>
+      <p:sp>
+        <p:nvSpPr>
+          <p:cNvPr id="24" name="Rectangle 23"/>
+          <p:cNvSpPr/>
+          <p:nvPr/>
+        </p:nvSpPr>
+        <p:spPr>
+          <a:xfrm>
+            <a:off x="7168896" y="3003804"/>
+            <a:ext cx="502920" cy="283464"/>
+          </a:xfrm>
+          <a:prstGeom prst="rect">
+            <a:avLst/>
+          </a:prstGeom>
+          <a:solidFill>
+            <a:srgbClr val="ECFDF3"/>
+          </a:solidFill>
+          <a:ln w="9525">
+            <a:solidFill>
+              <a:srgbClr val="A6F4C5"/>
+            </a:solidFill>
+          </a:ln>
+          <a:effectLst/>
+        </p:spPr>
+        <p:style>
+          <a:lnRef idx="1">
+            <a:schemeClr val="accent1"/>
+          </a:lnRef>
+          <a:fillRef idx="3">
+            <a:schemeClr val="accent1"/>
+          </a:fillRef>
+          <a:effectRef idx="2">
+            <a:schemeClr val="accent1"/>
+          </a:effectRef>
+          <a:fontRef idx="minor">
+            <a:schemeClr val="lt1"/>
+          </a:fontRef>
+        </p:style>
+        <p:txBody>
+          <a:bodyPr rtlCol="0" anchor="ctr" wrap="square"/>
+          <a:lstStyle/>
+          <a:p>
+            <a:pPr algn="ctr">
+              <a:lnSpc>
+                <a:spcPct val="100000"/>
+              </a:lnSpc>
+              <a:spcAft>
+                <a:spcPts val="300"/>
+              </a:spcAft>
+            </a:pPr>
+            <a:r>
+              <a:rPr sz="900" b="1">
+                <a:solidFill>
+                  <a:srgbClr val="067647"/>
+                </a:solidFill>
+                <a:latin typeface="Microsoft JhengHei"/>
+              </a:rPr>
+              <a:t>ok</a:t>
+            </a:r>
+          </a:p>
+        </p:txBody>
+      </p:sp>
+      <p:sp>
+        <p:nvSpPr>
+          <p:cNvPr id="25" name="Rectangle 24"/>
+          <p:cNvSpPr/>
+          <p:nvPr/>
+        </p:nvSpPr>
+        <p:spPr>
+          <a:xfrm>
+            <a:off x="4069080" y="3401568"/>
+            <a:ext cx="3703320" cy="507492"/>
+          </a:xfrm>
+          <a:prstGeom prst="rect">
+            <a:avLst/>
+          </a:prstGeom>
+          <a:solidFill>
+            <a:srgbClr val="F8FAFC"/>
+          </a:solidFill>
+          <a:ln w="6350">
+            <a:solidFill>
+              <a:srgbClr val="E4E7EC"/>
+            </a:solidFill>
+          </a:ln>
+          <a:effectLst/>
+        </p:spPr>
+        <p:style>
+          <a:lnRef idx="1">
+            <a:schemeClr val="accent1"/>
+          </a:lnRef>
+          <a:fillRef idx="3">
+            <a:schemeClr val="accent1"/>
+          </a:fillRef>
+          <a:effectRef idx="2">
+            <a:schemeClr val="accent1"/>
+          </a:effectRef>
+          <a:fontRef idx="minor">
+            <a:schemeClr val="lt1"/>
+          </a:fontRef>
+        </p:style>
+        <p:txBody>
+          <a:bodyPr rtlCol="0" anchor="ctr"/>
+          <a:lstStyle/>
+          <a:p>
+            <a:pPr algn="ctr"/>
+          </a:p>
+        </p:txBody>
+      </p:sp>
+      <p:sp>
+        <p:nvSpPr>
+          <p:cNvPr id="26" name="TextBox 25"/>
+          <p:cNvSpPr txBox="1"/>
+          <p:nvPr/>
+        </p:nvSpPr>
+        <p:spPr>
+          <a:xfrm>
+            <a:off x="4142232" y="3401568"/>
+            <a:ext cx="2011680" cy="507492"/>
+          </a:xfrm>
+          <a:prstGeom prst="rect">
+            <a:avLst/>
+          </a:prstGeom>
+          <a:noFill/>
+        </p:spPr>
+        <p:txBody>
+          <a:bodyPr wrap="square" anchor="ctr">
+            <a:spAutoFit/>
+          </a:bodyPr>
+          <a:lstStyle/>
+          <a:p>
+            <a:pPr algn="l">
+              <a:lnSpc>
+                <a:spcPct val="100000"/>
+              </a:lnSpc>
+              <a:spcAft>
+                <a:spcPts val="300"/>
+              </a:spcAft>
+            </a:pPr>
+            <a:r>
+              <a:rPr sz="900" b="1">
+                <a:solidFill>
+                  <a:srgbClr val="667085"/>
+                </a:solidFill>
+                <a:latin typeface="Consolas"/>
+              </a:rPr>
+              <a:t> 5 </a:t>
+            </a:r>
+            <a:r>
+              <a:rPr sz="1050" b="0">
+                <a:solidFill>
+                  <a:srgbClr val="1F2933"/>
+                </a:solidFill>
+                <a:latin typeface="Microsoft JhengHei"/>
+              </a:rPr>
+              <a:t>spc-drift</a:t>
+            </a:r>
+          </a:p>
+        </p:txBody>
+      </p:sp>
+      <p:sp>
+        <p:nvSpPr>
+          <p:cNvPr id="27" name="TextBox 26"/>
+          <p:cNvSpPr txBox="1"/>
+          <p:nvPr/>
+        </p:nvSpPr>
+        <p:spPr>
+          <a:xfrm>
+            <a:off x="5943600" y="3401568"/>
+            <a:ext cx="1005840" cy="507492"/>
+          </a:xfrm>
+          <a:prstGeom prst="rect">
+            <a:avLst/>
+          </a:prstGeom>
+          <a:noFill/>
+        </p:spPr>
+        <p:txBody>
+          <a:bodyPr wrap="square" anchor="ctr">
+            <a:spAutoFit/>
+          </a:bodyPr>
+          <a:lstStyle/>
+          <a:p>
+            <a:pPr algn="r">
+              <a:lnSpc>
+                <a:spcPct val="100000"/>
+              </a:lnSpc>
+              <a:spcAft>
+                <a:spcPts val="300"/>
+              </a:spcAft>
+            </a:pPr>
+            <a:r>
+              <a:rPr sz="950" b="0">
+                <a:solidFill>
+                  <a:srgbClr val="667085"/>
+                </a:solidFill>
+                <a:latin typeface="Consolas"/>
+              </a:rPr>
+              <a:t>17r · 79s</a:t>
+            </a:r>
+          </a:p>
+        </p:txBody>
+      </p:sp>
+      <p:sp>
+        <p:nvSpPr>
+          <p:cNvPr id="28" name="Rectangle 27"/>
+          <p:cNvSpPr/>
+          <p:nvPr/>
+        </p:nvSpPr>
+        <p:spPr>
+          <a:xfrm>
+            <a:off x="7168896" y="3511296"/>
+            <a:ext cx="502920" cy="283464"/>
+          </a:xfrm>
+          <a:prstGeom prst="rect">
+            <a:avLst/>
+          </a:prstGeom>
+          <a:solidFill>
+            <a:srgbClr val="ECFDF3"/>
+          </a:solidFill>
+          <a:ln w="9525">
+            <a:solidFill>
+              <a:srgbClr val="A6F4C5"/>
+            </a:solidFill>
+          </a:ln>
+          <a:effectLst/>
+        </p:spPr>
+        <p:style>
+          <a:lnRef idx="1">
+            <a:schemeClr val="accent1"/>
+          </a:lnRef>
+          <a:fillRef idx="3">
+            <a:schemeClr val="accent1"/>
+          </a:fillRef>
+          <a:effectRef idx="2">
+            <a:schemeClr val="accent1"/>
+          </a:effectRef>
+          <a:fontRef idx="minor">
+            <a:schemeClr val="lt1"/>
+          </a:fontRef>
+        </p:style>
+        <p:txBody>
+          <a:bodyPr rtlCol="0" anchor="ctr" wrap="square"/>
+          <a:lstStyle/>
+          <a:p>
+            <a:pPr algn="ctr">
+              <a:lnSpc>
+                <a:spcPct val="100000"/>
+              </a:lnSpc>
+              <a:spcAft>
+                <a:spcPts val="300"/>
+              </a:spcAft>
+            </a:pPr>
+            <a:r>
+              <a:rPr sz="900" b="1">
+                <a:solidFill>
+                  <a:srgbClr val="067647"/>
+                </a:solidFill>
+                <a:latin typeface="Microsoft JhengHei"/>
+              </a:rPr>
+              <a:t>ok</a:t>
+            </a:r>
+          </a:p>
+        </p:txBody>
+      </p:sp>
+      <p:sp>
+        <p:nvSpPr>
+          <p:cNvPr id="29" name="Rectangle 28"/>
+          <p:cNvSpPr/>
+          <p:nvPr/>
+        </p:nvSpPr>
+        <p:spPr>
+          <a:xfrm>
+            <a:off x="4069080" y="3909060"/>
+            <a:ext cx="3703320" cy="507492"/>
+          </a:xfrm>
+          <a:prstGeom prst="rect">
+            <a:avLst/>
+          </a:prstGeom>
+          <a:solidFill>
+            <a:srgbClr val="FFFFFF"/>
+          </a:solidFill>
+          <a:ln w="6350">
+            <a:solidFill>
+              <a:srgbClr val="E4E7EC"/>
+            </a:solidFill>
+          </a:ln>
+          <a:effectLst/>
+        </p:spPr>
+        <p:style>
+          <a:lnRef idx="1">
+            <a:schemeClr val="accent1"/>
+          </a:lnRef>
+          <a:fillRef idx="3">
+            <a:schemeClr val="accent1"/>
+          </a:fillRef>
+          <a:effectRef idx="2">
+            <a:schemeClr val="accent1"/>
+          </a:effectRef>
+          <a:fontRef idx="minor">
+            <a:schemeClr val="lt1"/>
+          </a:fontRef>
+        </p:style>
+        <p:txBody>
+          <a:bodyPr rtlCol="0" anchor="ctr"/>
+          <a:lstStyle/>
+          <a:p>
+            <a:pPr algn="ctr"/>
+          </a:p>
+        </p:txBody>
+      </p:sp>
+      <p:sp>
+        <p:nvSpPr>
+          <p:cNvPr id="30" name="TextBox 29"/>
+          <p:cNvSpPr txBox="1"/>
+          <p:nvPr/>
+        </p:nvSpPr>
+        <p:spPr>
+          <a:xfrm>
+            <a:off x="4142232" y="3909060"/>
+            <a:ext cx="2011680" cy="507492"/>
+          </a:xfrm>
+          <a:prstGeom prst="rect">
+            <a:avLst/>
+          </a:prstGeom>
+          <a:noFill/>
+        </p:spPr>
+        <p:txBody>
+          <a:bodyPr wrap="square" anchor="ctr">
+            <a:spAutoFit/>
+          </a:bodyPr>
+          <a:lstStyle/>
+          <a:p>
+            <a:pPr algn="l">
+              <a:lnSpc>
+                <a:spcPct val="100000"/>
+              </a:lnSpc>
+              <a:spcAft>
+                <a:spcPts val="300"/>
+              </a:spcAft>
+            </a:pPr>
+            <a:r>
+              <a:rPr sz="900" b="1">
+                <a:solidFill>
+                  <a:srgbClr val="667085"/>
+                </a:solidFill>
+                <a:latin typeface="Consolas"/>
+              </a:rPr>
+              <a:t> 6 </a:t>
+            </a:r>
+            <a:r>
+              <a:rPr sz="1050" b="0">
+                <a:solidFill>
+                  <a:srgbClr val="1F2933"/>
+                </a:solidFill>
+                <a:latin typeface="Microsoft JhengHei"/>
+              </a:rPr>
+              <a:t>spc-xbar-r-pair</a:t>
+            </a:r>
+          </a:p>
+        </p:txBody>
+      </p:sp>
+      <p:sp>
+        <p:nvSpPr>
+          <p:cNvPr id="31" name="TextBox 30"/>
+          <p:cNvSpPr txBox="1"/>
+          <p:nvPr/>
+        </p:nvSpPr>
+        <p:spPr>
+          <a:xfrm>
+            <a:off x="5943600" y="3909060"/>
+            <a:ext cx="1005840" cy="507492"/>
+          </a:xfrm>
+          <a:prstGeom prst="rect">
+            <a:avLst/>
+          </a:prstGeom>
+          <a:noFill/>
+        </p:spPr>
+        <p:txBody>
+          <a:bodyPr wrap="square" anchor="ctr">
+            <a:spAutoFit/>
+          </a:bodyPr>
+          <a:lstStyle/>
+          <a:p>
+            <a:pPr algn="r">
+              <a:lnSpc>
+                <a:spcPct val="100000"/>
+              </a:lnSpc>
+              <a:spcAft>
+                <a:spcPts val="300"/>
+              </a:spcAft>
+            </a:pPr>
+            <a:r>
+              <a:rPr sz="950" b="0">
+                <a:solidFill>
+                  <a:srgbClr val="667085"/>
+                </a:solidFill>
+                <a:latin typeface="Consolas"/>
+              </a:rPr>
+              <a:t>9r · 58s</a:t>
+            </a:r>
+          </a:p>
+        </p:txBody>
+      </p:sp>
+      <p:sp>
+        <p:nvSpPr>
+          <p:cNvPr id="32" name="Rectangle 31"/>
+          <p:cNvSpPr/>
+          <p:nvPr/>
+        </p:nvSpPr>
+        <p:spPr>
+          <a:xfrm>
+            <a:off x="7168896" y="4018788"/>
+            <a:ext cx="502920" cy="283464"/>
+          </a:xfrm>
+          <a:prstGeom prst="rect">
+            <a:avLst/>
+          </a:prstGeom>
+          <a:solidFill>
+            <a:srgbClr val="ECFDF3"/>
+          </a:solidFill>
+          <a:ln w="9525">
+            <a:solidFill>
+              <a:srgbClr val="A6F4C5"/>
+            </a:solidFill>
+          </a:ln>
+          <a:effectLst/>
+        </p:spPr>
+        <p:style>
+          <a:lnRef idx="1">
+            <a:schemeClr val="accent1"/>
+          </a:lnRef>
+          <a:fillRef idx="3">
+            <a:schemeClr val="accent1"/>
+          </a:fillRef>
+          <a:effectRef idx="2">
+            <a:schemeClr val="accent1"/>
+          </a:effectRef>
+          <a:fontRef idx="minor">
+            <a:schemeClr val="lt1"/>
+          </a:fontRef>
+        </p:style>
+        <p:txBody>
+          <a:bodyPr rtlCol="0" anchor="ctr" wrap="square"/>
+          <a:lstStyle/>
+          <a:p>
+            <a:pPr algn="ctr">
+              <a:lnSpc>
+                <a:spcPct val="100000"/>
+              </a:lnSpc>
+              <a:spcAft>
+                <a:spcPts val="300"/>
+              </a:spcAft>
+            </a:pPr>
+            <a:r>
+              <a:rPr sz="900" b="1">
+                <a:solidFill>
+                  <a:srgbClr val="067647"/>
+                </a:solidFill>
+                <a:latin typeface="Microsoft JhengHei"/>
+              </a:rPr>
+              <a:t>ok</a:t>
+            </a:r>
+          </a:p>
+        </p:txBody>
+      </p:sp>
+      <p:sp>
+        <p:nvSpPr>
+          <p:cNvPr id="33" name="Rectangle 32"/>
+          <p:cNvSpPr/>
+          <p:nvPr/>
+        </p:nvSpPr>
+        <p:spPr>
+          <a:xfrm>
+            <a:off x="4069080" y="4416552"/>
+            <a:ext cx="3703320" cy="507492"/>
+          </a:xfrm>
+          <a:prstGeom prst="rect">
+            <a:avLst/>
+          </a:prstGeom>
+          <a:solidFill>
+            <a:srgbClr val="F8FAFC"/>
+          </a:solidFill>
+          <a:ln w="6350">
+            <a:solidFill>
+              <a:srgbClr val="E4E7EC"/>
+            </a:solidFill>
+          </a:ln>
+          <a:effectLst/>
+        </p:spPr>
+        <p:style>
+          <a:lnRef idx="1">
+            <a:schemeClr val="accent1"/>
+          </a:lnRef>
+          <a:fillRef idx="3">
+            <a:schemeClr val="accent1"/>
+          </a:fillRef>
+          <a:effectRef idx="2">
+            <a:schemeClr val="accent1"/>
+          </a:effectRef>
+          <a:fontRef idx="minor">
+            <a:schemeClr val="lt1"/>
+          </a:fontRef>
+        </p:style>
+        <p:txBody>
+          <a:bodyPr rtlCol="0" anchor="ctr"/>
+          <a:lstStyle/>
+          <a:p>
+            <a:pPr algn="ctr"/>
+          </a:p>
+        </p:txBody>
+      </p:sp>
+      <p:sp>
+        <p:nvSpPr>
+          <p:cNvPr id="34" name="TextBox 33"/>
+          <p:cNvSpPr txBox="1"/>
+          <p:nvPr/>
+        </p:nvSpPr>
+        <p:spPr>
+          <a:xfrm>
+            <a:off x="4142232" y="4416552"/>
+            <a:ext cx="2011680" cy="507492"/>
+          </a:xfrm>
+          <a:prstGeom prst="rect">
+            <a:avLst/>
+          </a:prstGeom>
+          <a:noFill/>
+        </p:spPr>
+        <p:txBody>
+          <a:bodyPr wrap="square" anchor="ctr">
+            <a:spAutoFit/>
+          </a:bodyPr>
+          <a:lstStyle/>
+          <a:p>
+            <a:pPr algn="l">
+              <a:lnSpc>
+                <a:spcPct val="100000"/>
+              </a:lnSpc>
+              <a:spcAft>
+                <a:spcPts val="300"/>
+              </a:spcAft>
+            </a:pPr>
+            <a:r>
+              <a:rPr sz="900" b="1">
+                <a:solidFill>
+                  <a:srgbClr val="667085"/>
+                </a:solidFill>
+                <a:latin typeface="Consolas"/>
+              </a:rPr>
+              <a:t> 7 </a:t>
+            </a:r>
+            <a:r>
+              <a:rPr sz="1050" b="0">
+                <a:solidFill>
+                  <a:srgbClr val="1F2933"/>
+                </a:solidFill>
+                <a:latin typeface="Microsoft JhengHei"/>
+              </a:rPr>
+              <a:t>spc-multi-step</a:t>
+            </a:r>
+          </a:p>
+        </p:txBody>
+      </p:sp>
+      <p:sp>
+        <p:nvSpPr>
+          <p:cNvPr id="35" name="TextBox 34"/>
+          <p:cNvSpPr txBox="1"/>
+          <p:nvPr/>
+        </p:nvSpPr>
+        <p:spPr>
+          <a:xfrm>
+            <a:off x="5943600" y="4416552"/>
+            <a:ext cx="1005840" cy="507492"/>
+          </a:xfrm>
+          <a:prstGeom prst="rect">
+            <a:avLst/>
+          </a:prstGeom>
+          <a:noFill/>
+        </p:spPr>
+        <p:txBody>
+          <a:bodyPr wrap="square" anchor="ctr">
+            <a:spAutoFit/>
+          </a:bodyPr>
+          <a:lstStyle/>
+          <a:p>
+            <a:pPr algn="r">
+              <a:lnSpc>
+                <a:spcPct val="100000"/>
+              </a:lnSpc>
+              <a:spcAft>
+                <a:spcPts val="300"/>
+              </a:spcAft>
+            </a:pPr>
+            <a:r>
+              <a:rPr sz="950" b="0">
+                <a:solidFill>
+                  <a:srgbClr val="667085"/>
+                </a:solidFill>
+                <a:latin typeface="Consolas"/>
+              </a:rPr>
+              <a:t>8r · 31s</a:t>
+            </a:r>
+          </a:p>
+        </p:txBody>
+      </p:sp>
+      <p:sp>
+        <p:nvSpPr>
+          <p:cNvPr id="36" name="Rectangle 35"/>
+          <p:cNvSpPr/>
+          <p:nvPr/>
+        </p:nvSpPr>
+        <p:spPr>
+          <a:xfrm>
+            <a:off x="7168896" y="4526280"/>
+            <a:ext cx="502920" cy="283464"/>
+          </a:xfrm>
+          <a:prstGeom prst="rect">
+            <a:avLst/>
+          </a:prstGeom>
+          <a:solidFill>
+            <a:srgbClr val="ECFDF3"/>
+          </a:solidFill>
+          <a:ln w="9525">
+            <a:solidFill>
+              <a:srgbClr val="A6F4C5"/>
+            </a:solidFill>
+          </a:ln>
+          <a:effectLst/>
+        </p:spPr>
+        <p:style>
+          <a:lnRef idx="1">
+            <a:schemeClr val="accent1"/>
+          </a:lnRef>
+          <a:fillRef idx="3">
+            <a:schemeClr val="accent1"/>
+          </a:fillRef>
+          <a:effectRef idx="2">
+            <a:schemeClr val="accent1"/>
+          </a:effectRef>
+          <a:fontRef idx="minor">
+            <a:schemeClr val="lt1"/>
+          </a:fontRef>
+        </p:style>
+        <p:txBody>
+          <a:bodyPr rtlCol="0" anchor="ctr" wrap="square"/>
+          <a:lstStyle/>
+          <a:p>
+            <a:pPr algn="ctr">
+              <a:lnSpc>
+                <a:spcPct val="100000"/>
+              </a:lnSpc>
+              <a:spcAft>
+                <a:spcPts val="300"/>
+              </a:spcAft>
+            </a:pPr>
+            <a:r>
+              <a:rPr sz="900" b="1">
+                <a:solidFill>
+                  <a:srgbClr val="067647"/>
+                </a:solidFill>
+                <a:latin typeface="Microsoft JhengHei"/>
+              </a:rPr>
+              <a:t>ok</a:t>
+            </a:r>
+          </a:p>
+        </p:txBody>
+      </p:sp>
+      <p:sp>
+        <p:nvSpPr>
+          <p:cNvPr id="37" name="Rectangle 36"/>
+          <p:cNvSpPr/>
+          <p:nvPr/>
+        </p:nvSpPr>
+        <p:spPr>
+          <a:xfrm>
+            <a:off x="4069080" y="4924044"/>
+            <a:ext cx="3703320" cy="507492"/>
+          </a:xfrm>
+          <a:prstGeom prst="rect">
+            <a:avLst/>
+          </a:prstGeom>
+          <a:solidFill>
+            <a:srgbClr val="FFFFFF"/>
+          </a:solidFill>
+          <a:ln w="6350">
+            <a:solidFill>
+              <a:srgbClr val="E4E7EC"/>
+            </a:solidFill>
+          </a:ln>
+          <a:effectLst/>
+        </p:spPr>
+        <p:style>
+          <a:lnRef idx="1">
+            <a:schemeClr val="accent1"/>
+          </a:lnRef>
+          <a:fillRef idx="3">
+            <a:schemeClr val="accent1"/>
+          </a:fillRef>
+          <a:effectRef idx="2">
+            <a:schemeClr val="accent1"/>
+          </a:effectRef>
+          <a:fontRef idx="minor">
+            <a:schemeClr val="lt1"/>
+          </a:fontRef>
+        </p:style>
+        <p:txBody>
+          <a:bodyPr rtlCol="0" anchor="ctr"/>
+          <a:lstStyle/>
+          <a:p>
+            <a:pPr algn="ctr"/>
+          </a:p>
+        </p:txBody>
+      </p:sp>
+      <p:sp>
+        <p:nvSpPr>
+          <p:cNvPr id="38" name="TextBox 37"/>
+          <p:cNvSpPr txBox="1"/>
+          <p:nvPr/>
+        </p:nvSpPr>
+        <p:spPr>
+          <a:xfrm>
+            <a:off x="4142232" y="4924044"/>
+            <a:ext cx="2011680" cy="507492"/>
+          </a:xfrm>
+          <a:prstGeom prst="rect">
+            <a:avLst/>
+          </a:prstGeom>
+          <a:noFill/>
+        </p:spPr>
+        <p:txBody>
+          <a:bodyPr wrap="square" anchor="ctr">
+            <a:spAutoFit/>
+          </a:bodyPr>
+          <a:lstStyle/>
+          <a:p>
+            <a:pPr algn="l">
+              <a:lnSpc>
+                <a:spcPct val="100000"/>
+              </a:lnSpc>
+              <a:spcAft>
+                <a:spcPts val="300"/>
+              </a:spcAft>
+            </a:pPr>
+            <a:r>
+              <a:rPr sz="900" b="1">
+                <a:solidFill>
+                  <a:srgbClr val="667085"/>
+                </a:solidFill>
+                <a:latin typeface="Consolas"/>
+              </a:rPr>
+              <a:t> 8 </a:t>
+            </a:r>
+            <a:r>
+              <a:rPr sz="1050" b="0">
+                <a:solidFill>
+                  <a:srgbClr val="1F2933"/>
+                </a:solidFill>
+                <a:latin typeface="Microsoft JhengHei"/>
+              </a:rPr>
+              <a:t>spc-tool-box</a:t>
+            </a:r>
+          </a:p>
+        </p:txBody>
+      </p:sp>
+      <p:sp>
+        <p:nvSpPr>
+          <p:cNvPr id="39" name="TextBox 38"/>
+          <p:cNvSpPr txBox="1"/>
+          <p:nvPr/>
+        </p:nvSpPr>
+        <p:spPr>
+          <a:xfrm>
+            <a:off x="5943600" y="4924044"/>
+            <a:ext cx="1005840" cy="507492"/>
+          </a:xfrm>
+          <a:prstGeom prst="rect">
+            <a:avLst/>
+          </a:prstGeom>
+          <a:noFill/>
+        </p:spPr>
+        <p:txBody>
+          <a:bodyPr wrap="square" anchor="ctr">
+            <a:spAutoFit/>
+          </a:bodyPr>
+          <a:lstStyle/>
+          <a:p>
+            <a:pPr algn="r">
+              <a:lnSpc>
+                <a:spcPct val="100000"/>
+              </a:lnSpc>
+              <a:spcAft>
+                <a:spcPts val="300"/>
+              </a:spcAft>
+            </a:pPr>
+            <a:r>
+              <a:rPr sz="950" b="0">
+                <a:solidFill>
+                  <a:srgbClr val="667085"/>
+                </a:solidFill>
+                <a:latin typeface="Consolas"/>
+              </a:rPr>
+              <a:t>7r · 113s</a:t>
+            </a:r>
+          </a:p>
+        </p:txBody>
+      </p:sp>
+      <p:sp>
+        <p:nvSpPr>
+          <p:cNvPr id="40" name="Rectangle 39"/>
+          <p:cNvSpPr/>
+          <p:nvPr/>
+        </p:nvSpPr>
+        <p:spPr>
+          <a:xfrm>
+            <a:off x="7168896" y="5033772"/>
+            <a:ext cx="502920" cy="283464"/>
+          </a:xfrm>
+          <a:prstGeom prst="rect">
+            <a:avLst/>
+          </a:prstGeom>
+          <a:solidFill>
+            <a:srgbClr val="ECFDF3"/>
+          </a:solidFill>
+          <a:ln w="9525">
+            <a:solidFill>
+              <a:srgbClr val="A6F4C5"/>
+            </a:solidFill>
+          </a:ln>
+          <a:effectLst/>
+        </p:spPr>
+        <p:style>
+          <a:lnRef idx="1">
+            <a:schemeClr val="accent1"/>
+          </a:lnRef>
+          <a:fillRef idx="3">
+            <a:schemeClr val="accent1"/>
+          </a:fillRef>
+          <a:effectRef idx="2">
+            <a:schemeClr val="accent1"/>
+          </a:effectRef>
+          <a:fontRef idx="minor">
+            <a:schemeClr val="lt1"/>
+          </a:fontRef>
+        </p:style>
+        <p:txBody>
+          <a:bodyPr rtlCol="0" anchor="ctr" wrap="square"/>
+          <a:lstStyle/>
+          <a:p>
+            <a:pPr algn="ctr">
+              <a:lnSpc>
+                <a:spcPct val="100000"/>
+              </a:lnSpc>
+              <a:spcAft>
+                <a:spcPts val="300"/>
+              </a:spcAft>
+            </a:pPr>
+            <a:r>
+              <a:rPr sz="900" b="1">
+                <a:solidFill>
+                  <a:srgbClr val="067647"/>
+                </a:solidFill>
+                <a:latin typeface="Microsoft JhengHei"/>
+              </a:rPr>
+              <a:t>ok</a:t>
+            </a:r>
+          </a:p>
+        </p:txBody>
+      </p:sp>
+      <p:sp>
+        <p:nvSpPr>
+          <p:cNvPr id="41" name="Rectangle 40"/>
+          <p:cNvSpPr/>
+          <p:nvPr/>
+        </p:nvSpPr>
+        <p:spPr>
+          <a:xfrm>
+            <a:off x="4069080" y="5431536"/>
+            <a:ext cx="3703320" cy="507492"/>
+          </a:xfrm>
+          <a:prstGeom prst="rect">
+            <a:avLst/>
+          </a:prstGeom>
+          <a:solidFill>
+            <a:srgbClr val="F8FAFC"/>
+          </a:solidFill>
+          <a:ln w="6350">
+            <a:solidFill>
+              <a:srgbClr val="E4E7EC"/>
+            </a:solidFill>
+          </a:ln>
+          <a:effectLst/>
+        </p:spPr>
+        <p:style>
+          <a:lnRef idx="1">
+            <a:schemeClr val="accent1"/>
+          </a:lnRef>
+          <a:fillRef idx="3">
+            <a:schemeClr val="accent1"/>
+          </a:fillRef>
+          <a:effectRef idx="2">
+            <a:schemeClr val="accent1"/>
+          </a:effectRef>
+          <a:fontRef idx="minor">
+            <a:schemeClr val="lt1"/>
+          </a:fontRef>
+        </p:style>
+        <p:txBody>
+          <a:bodyPr rtlCol="0" anchor="ctr"/>
+          <a:lstStyle/>
+          <a:p>
+            <a:pPr algn="ctr"/>
+          </a:p>
+        </p:txBody>
+      </p:sp>
+      <p:sp>
+        <p:nvSpPr>
+          <p:cNvPr id="42" name="TextBox 41"/>
+          <p:cNvSpPr txBox="1"/>
+          <p:nvPr/>
+        </p:nvSpPr>
+        <p:spPr>
+          <a:xfrm>
+            <a:off x="4142232" y="5431536"/>
+            <a:ext cx="2011680" cy="507492"/>
+          </a:xfrm>
+          <a:prstGeom prst="rect">
+            <a:avLst/>
+          </a:prstGeom>
+          <a:noFill/>
+        </p:spPr>
+        <p:txBody>
+          <a:bodyPr wrap="square" anchor="ctr">
+            <a:spAutoFit/>
+          </a:bodyPr>
+          <a:lstStyle/>
+          <a:p>
+            <a:pPr algn="l">
+              <a:lnSpc>
+                <a:spcPct val="100000"/>
+              </a:lnSpc>
+              <a:spcAft>
+                <a:spcPts val="300"/>
+              </a:spcAft>
+            </a:pPr>
+            <a:r>
+              <a:rPr sz="900" b="1">
+                <a:solidFill>
+                  <a:srgbClr val="667085"/>
+                </a:solidFill>
+                <a:latin typeface="Consolas"/>
+              </a:rPr>
+              <a:t> 9 </a:t>
+            </a:r>
+            <a:r>
+              <a:rPr sz="1050" b="0">
+                <a:solidFill>
+                  <a:srgbClr val="1F2933"/>
+                </a:solidFill>
+                <a:latin typeface="Microsoft JhengHei"/>
+              </a:rPr>
+              <a:t>spc-normality</a:t>
+            </a:r>
+          </a:p>
+        </p:txBody>
+      </p:sp>
+      <p:sp>
+        <p:nvSpPr>
+          <p:cNvPr id="43" name="TextBox 42"/>
+          <p:cNvSpPr txBox="1"/>
+          <p:nvPr/>
+        </p:nvSpPr>
+        <p:spPr>
+          <a:xfrm>
+            <a:off x="5943600" y="5431536"/>
+            <a:ext cx="1005840" cy="507492"/>
+          </a:xfrm>
+          <a:prstGeom prst="rect">
+            <a:avLst/>
+          </a:prstGeom>
+          <a:noFill/>
+        </p:spPr>
+        <p:txBody>
+          <a:bodyPr wrap="square" anchor="ctr">
+            <a:spAutoFit/>
+          </a:bodyPr>
+          <a:lstStyle/>
+          <a:p>
+            <a:pPr algn="r">
+              <a:lnSpc>
+                <a:spcPct val="100000"/>
+              </a:lnSpc>
+              <a:spcAft>
+                <a:spcPts val="300"/>
+              </a:spcAft>
+            </a:pPr>
+            <a:r>
+              <a:rPr sz="950" b="0">
+                <a:solidFill>
+                  <a:srgbClr val="667085"/>
+                </a:solidFill>
+                <a:latin typeface="Consolas"/>
+              </a:rPr>
+              <a:t>9r · 29s</a:t>
+            </a:r>
+          </a:p>
+        </p:txBody>
+      </p:sp>
+      <p:sp>
+        <p:nvSpPr>
+          <p:cNvPr id="44" name="Rectangle 43"/>
+          <p:cNvSpPr/>
+          <p:nvPr/>
+        </p:nvSpPr>
+        <p:spPr>
+          <a:xfrm>
+            <a:off x="7168896" y="5541264"/>
+            <a:ext cx="502920" cy="283464"/>
+          </a:xfrm>
+          <a:prstGeom prst="rect">
+            <a:avLst/>
+          </a:prstGeom>
+          <a:solidFill>
+            <a:srgbClr val="ECFDF3"/>
+          </a:solidFill>
+          <a:ln w="9525">
+            <a:solidFill>
+              <a:srgbClr val="A6F4C5"/>
+            </a:solidFill>
+          </a:ln>
+          <a:effectLst/>
+        </p:spPr>
+        <p:style>
+          <a:lnRef idx="1">
+            <a:schemeClr val="accent1"/>
+          </a:lnRef>
+          <a:fillRef idx="3">
+            <a:schemeClr val="accent1"/>
+          </a:fillRef>
+          <a:effectRef idx="2">
+            <a:schemeClr val="accent1"/>
+          </a:effectRef>
+          <a:fontRef idx="minor">
+            <a:schemeClr val="lt1"/>
+          </a:fontRef>
+        </p:style>
+        <p:txBody>
+          <a:bodyPr rtlCol="0" anchor="ctr" wrap="square"/>
+          <a:lstStyle/>
+          <a:p>
+            <a:pPr algn="ctr">
+              <a:lnSpc>
+                <a:spcPct val="100000"/>
+              </a:lnSpc>
+              <a:spcAft>
+                <a:spcPts val="300"/>
+              </a:spcAft>
+            </a:pPr>
+            <a:r>
+              <a:rPr sz="900" b="1">
+                <a:solidFill>
+                  <a:srgbClr val="067647"/>
+                </a:solidFill>
+                <a:latin typeface="Microsoft JhengHei"/>
+              </a:rPr>
+              <a:t>ok</a:t>
+            </a:r>
+          </a:p>
+        </p:txBody>
+      </p:sp>
+      <p:sp>
+        <p:nvSpPr>
+          <p:cNvPr id="45" name="Rectangle 44"/>
+          <p:cNvSpPr/>
+          <p:nvPr/>
+        </p:nvSpPr>
+        <p:spPr>
+          <a:xfrm>
+            <a:off x="7882127" y="1371600"/>
+            <a:ext cx="3703320" cy="507492"/>
+          </a:xfrm>
+          <a:prstGeom prst="rect">
+            <a:avLst/>
+          </a:prstGeom>
+          <a:solidFill>
+            <a:srgbClr val="F8FAFC"/>
+          </a:solidFill>
+          <a:ln w="6350">
+            <a:solidFill>
+              <a:srgbClr val="E4E7EC"/>
+            </a:solidFill>
+          </a:ln>
+          <a:effectLst/>
+        </p:spPr>
+        <p:style>
+          <a:lnRef idx="1">
+            <a:schemeClr val="accent1"/>
+          </a:lnRef>
+          <a:fillRef idx="3">
+            <a:schemeClr val="accent1"/>
+          </a:fillRef>
+          <a:effectRef idx="2">
+            <a:schemeClr val="accent1"/>
+          </a:effectRef>
+          <a:fontRef idx="minor">
+            <a:schemeClr val="lt1"/>
+          </a:fontRef>
+        </p:style>
+        <p:txBody>
+          <a:bodyPr rtlCol="0" anchor="ctr"/>
+          <a:lstStyle/>
+          <a:p>
+            <a:pPr algn="ctr"/>
+          </a:p>
+        </p:txBody>
+      </p:sp>
+      <p:sp>
+        <p:nvSpPr>
+          <p:cNvPr id="46" name="TextBox 45"/>
+          <p:cNvSpPr txBox="1"/>
+          <p:nvPr/>
+        </p:nvSpPr>
+        <p:spPr>
+          <a:xfrm>
+            <a:off x="7955279" y="1371600"/>
+            <a:ext cx="2011680" cy="507492"/>
+          </a:xfrm>
+          <a:prstGeom prst="rect">
+            <a:avLst/>
+          </a:prstGeom>
+          <a:noFill/>
+        </p:spPr>
+        <p:txBody>
+          <a:bodyPr wrap="square" anchor="ctr">
+            <a:spAutoFit/>
+          </a:bodyPr>
+          <a:lstStyle/>
+          <a:p>
+            <a:pPr algn="l">
+              <a:lnSpc>
+                <a:spcPct val="100000"/>
+              </a:lnSpc>
+              <a:spcAft>
+                <a:spcPts val="300"/>
+              </a:spcAft>
+            </a:pPr>
+            <a:r>
+              <a:rPr sz="900" b="1">
+                <a:solidFill>
+                  <a:srgbClr val="667085"/>
+                </a:solidFill>
+                <a:latin typeface="Consolas"/>
+              </a:rPr>
+              <a:t>10 </a:t>
+            </a:r>
+            <a:r>
+              <a:rPr sz="1050" b="0">
+                <a:solidFill>
+                  <a:srgbClr val="1F2933"/>
+                </a:solidFill>
+                <a:latin typeface="Microsoft JhengHei"/>
+              </a:rPr>
+              <a:t>spc-cusum</a:t>
+            </a:r>
+          </a:p>
+        </p:txBody>
+      </p:sp>
+      <p:sp>
+        <p:nvSpPr>
+          <p:cNvPr id="47" name="TextBox 46"/>
+          <p:cNvSpPr txBox="1"/>
+          <p:nvPr/>
+        </p:nvSpPr>
+        <p:spPr>
+          <a:xfrm>
+            <a:off x="9756647" y="1371600"/>
+            <a:ext cx="1005840" cy="507492"/>
+          </a:xfrm>
+          <a:prstGeom prst="rect">
+            <a:avLst/>
+          </a:prstGeom>
+          <a:noFill/>
+        </p:spPr>
+        <p:txBody>
+          <a:bodyPr wrap="square" anchor="ctr">
+            <a:spAutoFit/>
+          </a:bodyPr>
+          <a:lstStyle/>
+          <a:p>
+            <a:pPr algn="r">
+              <a:lnSpc>
+                <a:spcPct val="100000"/>
+              </a:lnSpc>
+              <a:spcAft>
+                <a:spcPts val="300"/>
+              </a:spcAft>
+            </a:pPr>
+            <a:r>
+              <a:rPr sz="950" b="0">
+                <a:solidFill>
+                  <a:srgbClr val="667085"/>
+                </a:solidFill>
+                <a:latin typeface="Consolas"/>
+              </a:rPr>
+              <a:t>9r · 46s</a:t>
+            </a:r>
+          </a:p>
+        </p:txBody>
+      </p:sp>
+      <p:sp>
+        <p:nvSpPr>
+          <p:cNvPr id="48" name="Rectangle 47"/>
+          <p:cNvSpPr/>
+          <p:nvPr/>
+        </p:nvSpPr>
+        <p:spPr>
+          <a:xfrm>
+            <a:off x="10981943" y="1481328"/>
+            <a:ext cx="502920" cy="283464"/>
+          </a:xfrm>
+          <a:prstGeom prst="rect">
+            <a:avLst/>
+          </a:prstGeom>
+          <a:solidFill>
+            <a:srgbClr val="ECFDF3"/>
+          </a:solidFill>
+          <a:ln w="9525">
+            <a:solidFill>
+              <a:srgbClr val="A6F4C5"/>
+            </a:solidFill>
+          </a:ln>
+          <a:effectLst/>
+        </p:spPr>
+        <p:style>
+          <a:lnRef idx="1">
+            <a:schemeClr val="accent1"/>
+          </a:lnRef>
+          <a:fillRef idx="3">
+            <a:schemeClr val="accent1"/>
+          </a:fillRef>
+          <a:effectRef idx="2">
+            <a:schemeClr val="accent1"/>
+          </a:effectRef>
+          <a:fontRef idx="minor">
+            <a:schemeClr val="lt1"/>
+          </a:fontRef>
+        </p:style>
+        <p:txBody>
+          <a:bodyPr rtlCol="0" anchor="ctr" wrap="square"/>
+          <a:lstStyle/>
+          <a:p>
+            <a:pPr algn="ctr">
+              <a:lnSpc>
+                <a:spcPct val="100000"/>
+              </a:lnSpc>
+              <a:spcAft>
+                <a:spcPts val="300"/>
+              </a:spcAft>
+            </a:pPr>
+            <a:r>
+              <a:rPr sz="900" b="1">
+                <a:solidFill>
+                  <a:srgbClr val="067647"/>
+                </a:solidFill>
+                <a:latin typeface="Microsoft JhengHei"/>
+              </a:rPr>
+              <a:t>ok</a:t>
+            </a:r>
+          </a:p>
+        </p:txBody>
+      </p:sp>
+      <p:sp>
+        <p:nvSpPr>
+          <p:cNvPr id="49" name="Rectangle 48"/>
+          <p:cNvSpPr/>
+          <p:nvPr/>
+        </p:nvSpPr>
+        <p:spPr>
+          <a:xfrm>
+            <a:off x="7882127" y="1879092"/>
+            <a:ext cx="3703320" cy="507492"/>
+          </a:xfrm>
+          <a:prstGeom prst="rect">
+            <a:avLst/>
+          </a:prstGeom>
+          <a:solidFill>
+            <a:srgbClr val="FFFFFF"/>
+          </a:solidFill>
+          <a:ln w="6350">
+            <a:solidFill>
+              <a:srgbClr val="E4E7EC"/>
+            </a:solidFill>
+          </a:ln>
+          <a:effectLst/>
+        </p:spPr>
+        <p:style>
+          <a:lnRef idx="1">
+            <a:schemeClr val="accent1"/>
+          </a:lnRef>
+          <a:fillRef idx="3">
+            <a:schemeClr val="accent1"/>
+          </a:fillRef>
+          <a:effectRef idx="2">
+            <a:schemeClr val="accent1"/>
+          </a:effectRef>
+          <a:fontRef idx="minor">
+            <a:schemeClr val="lt1"/>
+          </a:fontRef>
+        </p:style>
+        <p:txBody>
+          <a:bodyPr rtlCol="0" anchor="ctr"/>
+          <a:lstStyle/>
+          <a:p>
+            <a:pPr algn="ctr"/>
+          </a:p>
+        </p:txBody>
+      </p:sp>
+      <p:sp>
+        <p:nvSpPr>
+          <p:cNvPr id="50" name="TextBox 49"/>
+          <p:cNvSpPr txBox="1"/>
+          <p:nvPr/>
+        </p:nvSpPr>
+        <p:spPr>
+          <a:xfrm>
+            <a:off x="7955279" y="1879092"/>
+            <a:ext cx="2011680" cy="507492"/>
+          </a:xfrm>
+          <a:prstGeom prst="rect">
+            <a:avLst/>
+          </a:prstGeom>
+          <a:noFill/>
+        </p:spPr>
+        <p:txBody>
+          <a:bodyPr wrap="square" anchor="ctr">
+            <a:spAutoFit/>
+          </a:bodyPr>
+          <a:lstStyle/>
+          <a:p>
+            <a:pPr algn="l">
+              <a:lnSpc>
+                <a:spcPct val="100000"/>
+              </a:lnSpc>
+              <a:spcAft>
+                <a:spcPts val="300"/>
+              </a:spcAft>
+            </a:pPr>
+            <a:r>
+              <a:rPr sz="900" b="1">
+                <a:solidFill>
+                  <a:srgbClr val="667085"/>
+                </a:solidFill>
+                <a:latin typeface="Consolas"/>
+              </a:rPr>
+              <a:t>11 </a:t>
+            </a:r>
+            <a:r>
+              <a:rPr sz="1050" b="0">
+                <a:solidFill>
+                  <a:srgbClr val="1F2933"/>
+                </a:solidFill>
+                <a:latin typeface="Microsoft JhengHei"/>
+              </a:rPr>
+              <a:t>apc-drift</a:t>
+            </a:r>
+          </a:p>
+        </p:txBody>
+      </p:sp>
+      <p:sp>
+        <p:nvSpPr>
+          <p:cNvPr id="51" name="TextBox 50"/>
+          <p:cNvSpPr txBox="1"/>
+          <p:nvPr/>
+        </p:nvSpPr>
+        <p:spPr>
+          <a:xfrm>
+            <a:off x="9756647" y="1879092"/>
+            <a:ext cx="1005840" cy="507492"/>
+          </a:xfrm>
+          <a:prstGeom prst="rect">
+            <a:avLst/>
+          </a:prstGeom>
+          <a:noFill/>
+        </p:spPr>
+        <p:txBody>
+          <a:bodyPr wrap="square" anchor="ctr">
+            <a:spAutoFit/>
+          </a:bodyPr>
+          <a:lstStyle/>
+          <a:p>
+            <a:pPr algn="r">
+              <a:lnSpc>
+                <a:spcPct val="100000"/>
+              </a:lnSpc>
+              <a:spcAft>
+                <a:spcPts val="300"/>
+              </a:spcAft>
+            </a:pPr>
+            <a:r>
+              <a:rPr sz="950" b="0">
+                <a:solidFill>
+                  <a:srgbClr val="667085"/>
+                </a:solidFill>
+                <a:latin typeface="Consolas"/>
+              </a:rPr>
+              <a:t>12r · 134s</a:t>
+            </a:r>
+          </a:p>
+        </p:txBody>
+      </p:sp>
+      <p:sp>
+        <p:nvSpPr>
+          <p:cNvPr id="52" name="Rectangle 51"/>
+          <p:cNvSpPr/>
+          <p:nvPr/>
+        </p:nvSpPr>
+        <p:spPr>
+          <a:xfrm>
+            <a:off x="10981943" y="1988820"/>
+            <a:ext cx="502920" cy="283464"/>
+          </a:xfrm>
+          <a:prstGeom prst="rect">
+            <a:avLst/>
+          </a:prstGeom>
+          <a:solidFill>
+            <a:srgbClr val="ECFDF3"/>
+          </a:solidFill>
+          <a:ln w="9525">
+            <a:solidFill>
+              <a:srgbClr val="A6F4C5"/>
+            </a:solidFill>
+          </a:ln>
+          <a:effectLst/>
+        </p:spPr>
+        <p:style>
+          <a:lnRef idx="1">
+            <a:schemeClr val="accent1"/>
+          </a:lnRef>
+          <a:fillRef idx="3">
+            <a:schemeClr val="accent1"/>
+          </a:fillRef>
+          <a:effectRef idx="2">
+            <a:schemeClr val="accent1"/>
+          </a:effectRef>
+          <a:fontRef idx="minor">
+            <a:schemeClr val="lt1"/>
+          </a:fontRef>
+        </p:style>
+        <p:txBody>
+          <a:bodyPr rtlCol="0" anchor="ctr" wrap="square"/>
+          <a:lstStyle/>
+          <a:p>
+            <a:pPr algn="ctr">
+              <a:lnSpc>
+                <a:spcPct val="100000"/>
+              </a:lnSpc>
+              <a:spcAft>
+                <a:spcPts val="300"/>
+              </a:spcAft>
+            </a:pPr>
+            <a:r>
+              <a:rPr sz="900" b="1">
+                <a:solidFill>
+                  <a:srgbClr val="067647"/>
+                </a:solidFill>
+                <a:latin typeface="Microsoft JhengHei"/>
+              </a:rPr>
+              <a:t>ok</a:t>
+            </a:r>
+          </a:p>
+        </p:txBody>
+      </p:sp>
+      <p:sp>
+        <p:nvSpPr>
+          <p:cNvPr id="53" name="Rectangle 52"/>
+          <p:cNvSpPr/>
+          <p:nvPr/>
+        </p:nvSpPr>
+        <p:spPr>
+          <a:xfrm>
+            <a:off x="7882127" y="2386584"/>
+            <a:ext cx="3703320" cy="507492"/>
+          </a:xfrm>
+          <a:prstGeom prst="rect">
+            <a:avLst/>
+          </a:prstGeom>
+          <a:solidFill>
+            <a:srgbClr val="F8FAFC"/>
+          </a:solidFill>
+          <a:ln w="6350">
+            <a:solidFill>
+              <a:srgbClr val="E4E7EC"/>
+            </a:solidFill>
+          </a:ln>
+          <a:effectLst/>
+        </p:spPr>
+        <p:style>
+          <a:lnRef idx="1">
+            <a:schemeClr val="accent1"/>
+          </a:lnRef>
+          <a:fillRef idx="3">
+            <a:schemeClr val="accent1"/>
+          </a:fillRef>
+          <a:effectRef idx="2">
+            <a:schemeClr val="accent1"/>
+          </a:effectRef>
+          <a:fontRef idx="minor">
+            <a:schemeClr val="lt1"/>
+          </a:fontRef>
+        </p:style>
+        <p:txBody>
+          <a:bodyPr rtlCol="0" anchor="ctr"/>
+          <a:lstStyle/>
+          <a:p>
+            <a:pPr algn="ctr"/>
+          </a:p>
+        </p:txBody>
+      </p:sp>
+      <p:sp>
+        <p:nvSpPr>
+          <p:cNvPr id="54" name="TextBox 53"/>
+          <p:cNvSpPr txBox="1"/>
+          <p:nvPr/>
+        </p:nvSpPr>
+        <p:spPr>
+          <a:xfrm>
+            <a:off x="7955279" y="2386584"/>
+            <a:ext cx="2011680" cy="507492"/>
+          </a:xfrm>
+          <a:prstGeom prst="rect">
+            <a:avLst/>
+          </a:prstGeom>
+          <a:noFill/>
+        </p:spPr>
+        <p:txBody>
+          <a:bodyPr wrap="square" anchor="ctr">
+            <a:spAutoFit/>
+          </a:bodyPr>
+          <a:lstStyle/>
+          <a:p>
+            <a:pPr algn="l">
+              <a:lnSpc>
+                <a:spcPct val="100000"/>
+              </a:lnSpc>
+              <a:spcAft>
+                <a:spcPts val="300"/>
+              </a:spcAft>
+            </a:pPr>
+            <a:r>
+              <a:rPr sz="900" b="1">
+                <a:solidFill>
+                  <a:srgbClr val="667085"/>
+                </a:solidFill>
+                <a:latin typeface="Consolas"/>
+              </a:rPr>
+              <a:t>12 </a:t>
+            </a:r>
+            <a:r>
+              <a:rPr sz="1050" b="0">
+                <a:solidFill>
+                  <a:srgbClr val="1F2933"/>
+                </a:solidFill>
+                <a:latin typeface="Microsoft JhengHei"/>
+              </a:rPr>
+              <a:t>apc-trend</a:t>
+            </a:r>
+          </a:p>
+        </p:txBody>
+      </p:sp>
+      <p:sp>
+        <p:nvSpPr>
+          <p:cNvPr id="55" name="TextBox 54"/>
+          <p:cNvSpPr txBox="1"/>
+          <p:nvPr/>
+        </p:nvSpPr>
+        <p:spPr>
+          <a:xfrm>
+            <a:off x="9756647" y="2386584"/>
+            <a:ext cx="1005840" cy="507492"/>
+          </a:xfrm>
+          <a:prstGeom prst="rect">
+            <a:avLst/>
+          </a:prstGeom>
+          <a:noFill/>
+        </p:spPr>
+        <p:txBody>
+          <a:bodyPr wrap="square" anchor="ctr">
+            <a:spAutoFit/>
+          </a:bodyPr>
+          <a:lstStyle/>
+          <a:p>
+            <a:pPr algn="r">
+              <a:lnSpc>
+                <a:spcPct val="100000"/>
+              </a:lnSpc>
+              <a:spcAft>
+                <a:spcPts val="300"/>
+              </a:spcAft>
+            </a:pPr>
+            <a:r>
+              <a:rPr sz="950" b="0">
+                <a:solidFill>
+                  <a:srgbClr val="667085"/>
+                </a:solidFill>
+                <a:latin typeface="Consolas"/>
+              </a:rPr>
+              <a:t>3r · 17s</a:t>
+            </a:r>
+          </a:p>
+        </p:txBody>
+      </p:sp>
+      <p:sp>
+        <p:nvSpPr>
+          <p:cNvPr id="56" name="Rectangle 55"/>
+          <p:cNvSpPr/>
+          <p:nvPr/>
+        </p:nvSpPr>
+        <p:spPr>
+          <a:xfrm>
+            <a:off x="10981943" y="2496312"/>
+            <a:ext cx="502920" cy="283464"/>
+          </a:xfrm>
+          <a:prstGeom prst="rect">
+            <a:avLst/>
+          </a:prstGeom>
+          <a:solidFill>
+            <a:srgbClr val="ECFDF3"/>
+          </a:solidFill>
+          <a:ln w="9525">
+            <a:solidFill>
+              <a:srgbClr val="A6F4C5"/>
+            </a:solidFill>
+          </a:ln>
+          <a:effectLst/>
+        </p:spPr>
+        <p:style>
+          <a:lnRef idx="1">
+            <a:schemeClr val="accent1"/>
+          </a:lnRef>
+          <a:fillRef idx="3">
+            <a:schemeClr val="accent1"/>
+          </a:fillRef>
+          <a:effectRef idx="2">
+            <a:schemeClr val="accent1"/>
+          </a:effectRef>
+          <a:fontRef idx="minor">
+            <a:schemeClr val="lt1"/>
+          </a:fontRef>
+        </p:style>
+        <p:txBody>
+          <a:bodyPr rtlCol="0" anchor="ctr" wrap="square"/>
+          <a:lstStyle/>
+          <a:p>
+            <a:pPr algn="ctr">
+              <a:lnSpc>
+                <a:spcPct val="100000"/>
+              </a:lnSpc>
+              <a:spcAft>
+                <a:spcPts val="300"/>
+              </a:spcAft>
+            </a:pPr>
+            <a:r>
+              <a:rPr sz="900" b="1">
+                <a:solidFill>
+                  <a:srgbClr val="067647"/>
+                </a:solidFill>
+                <a:latin typeface="Microsoft JhengHei"/>
+              </a:rPr>
+              <a:t>ok</a:t>
+            </a:r>
+          </a:p>
+        </p:txBody>
+      </p:sp>
+      <p:sp>
+        <p:nvSpPr>
+          <p:cNvPr id="57" name="Rectangle 56"/>
+          <p:cNvSpPr/>
+          <p:nvPr/>
+        </p:nvSpPr>
+        <p:spPr>
+          <a:xfrm>
+            <a:off x="7882127" y="2894076"/>
+            <a:ext cx="3703320" cy="507492"/>
+          </a:xfrm>
+          <a:prstGeom prst="rect">
+            <a:avLst/>
+          </a:prstGeom>
+          <a:solidFill>
+            <a:srgbClr val="FFFFFF"/>
+          </a:solidFill>
+          <a:ln w="6350">
+            <a:solidFill>
+              <a:srgbClr val="E4E7EC"/>
+            </a:solidFill>
+          </a:ln>
+          <a:effectLst/>
+        </p:spPr>
+        <p:style>
+          <a:lnRef idx="1">
+            <a:schemeClr val="accent1"/>
+          </a:lnRef>
+          <a:fillRef idx="3">
+            <a:schemeClr val="accent1"/>
+          </a:fillRef>
+          <a:effectRef idx="2">
+            <a:schemeClr val="accent1"/>
+          </a:effectRef>
+          <a:fontRef idx="minor">
+            <a:schemeClr val="lt1"/>
+          </a:fontRef>
+        </p:style>
+        <p:txBody>
+          <a:bodyPr rtlCol="0" anchor="ctr"/>
+          <a:lstStyle/>
+          <a:p>
+            <a:pPr algn="ctr"/>
+          </a:p>
+        </p:txBody>
+      </p:sp>
+      <p:sp>
+        <p:nvSpPr>
+          <p:cNvPr id="58" name="TextBox 57"/>
+          <p:cNvSpPr txBox="1"/>
+          <p:nvPr/>
+        </p:nvSpPr>
+        <p:spPr>
+          <a:xfrm>
+            <a:off x="7955279" y="2894076"/>
+            <a:ext cx="2011680" cy="507492"/>
+          </a:xfrm>
+          <a:prstGeom prst="rect">
+            <a:avLst/>
+          </a:prstGeom>
+          <a:noFill/>
+        </p:spPr>
+        <p:txBody>
+          <a:bodyPr wrap="square" anchor="ctr">
+            <a:spAutoFit/>
+          </a:bodyPr>
+          <a:lstStyle/>
+          <a:p>
+            <a:pPr algn="l">
+              <a:lnSpc>
+                <a:spcPct val="100000"/>
+              </a:lnSpc>
+              <a:spcAft>
+                <a:spcPts val="300"/>
+              </a:spcAft>
+            </a:pPr>
+            <a:r>
+              <a:rPr sz="900" b="1">
+                <a:solidFill>
+                  <a:srgbClr val="667085"/>
+                </a:solidFill>
+                <a:latin typeface="Consolas"/>
+              </a:rPr>
+              <a:t>13 </a:t>
+            </a:r>
+            <a:r>
+              <a:rPr sz="1050" b="0">
+                <a:solidFill>
+                  <a:srgbClr val="1F2933"/>
+                </a:solidFill>
+                <a:latin typeface="Microsoft JhengHei"/>
+              </a:rPr>
+              <a:t>apc-recipe-compare</a:t>
+            </a:r>
+          </a:p>
+        </p:txBody>
+      </p:sp>
+      <p:sp>
+        <p:nvSpPr>
+          <p:cNvPr id="59" name="TextBox 58"/>
+          <p:cNvSpPr txBox="1"/>
+          <p:nvPr/>
+        </p:nvSpPr>
+        <p:spPr>
+          <a:xfrm>
+            <a:off x="9756647" y="2894076"/>
+            <a:ext cx="1005840" cy="507492"/>
+          </a:xfrm>
+          <a:prstGeom prst="rect">
+            <a:avLst/>
+          </a:prstGeom>
+          <a:noFill/>
+        </p:spPr>
+        <p:txBody>
+          <a:bodyPr wrap="square" anchor="ctr">
+            <a:spAutoFit/>
+          </a:bodyPr>
+          <a:lstStyle/>
+          <a:p>
+            <a:pPr algn="r">
+              <a:lnSpc>
+                <a:spcPct val="100000"/>
+              </a:lnSpc>
+              <a:spcAft>
+                <a:spcPts val="300"/>
+              </a:spcAft>
+            </a:pPr>
+            <a:r>
+              <a:rPr sz="950" b="0">
+                <a:solidFill>
+                  <a:srgbClr val="667085"/>
+                </a:solidFill>
+                <a:latin typeface="Consolas"/>
+              </a:rPr>
+              <a:t>34r · 19s</a:t>
+            </a:r>
+          </a:p>
+        </p:txBody>
+      </p:sp>
+      <p:sp>
+        <p:nvSpPr>
+          <p:cNvPr id="60" name="Rectangle 59"/>
+          <p:cNvSpPr/>
+          <p:nvPr/>
+        </p:nvSpPr>
+        <p:spPr>
+          <a:xfrm>
+            <a:off x="10981943" y="3003804"/>
+            <a:ext cx="502920" cy="283464"/>
+          </a:xfrm>
+          <a:prstGeom prst="rect">
+            <a:avLst/>
+          </a:prstGeom>
+          <a:solidFill>
+            <a:srgbClr val="ECFDF3"/>
+          </a:solidFill>
+          <a:ln w="9525">
+            <a:solidFill>
+              <a:srgbClr val="A6F4C5"/>
+            </a:solidFill>
+          </a:ln>
+          <a:effectLst/>
+        </p:spPr>
+        <p:style>
+          <a:lnRef idx="1">
+            <a:schemeClr val="accent1"/>
+          </a:lnRef>
+          <a:fillRef idx="3">
+            <a:schemeClr val="accent1"/>
+          </a:fillRef>
+          <a:effectRef idx="2">
+            <a:schemeClr val="accent1"/>
+          </a:effectRef>
+          <a:fontRef idx="minor">
+            <a:schemeClr val="lt1"/>
+          </a:fontRef>
+        </p:style>
+        <p:txBody>
+          <a:bodyPr rtlCol="0" anchor="ctr" wrap="square"/>
+          <a:lstStyle/>
+          <a:p>
+            <a:pPr algn="ctr">
+              <a:lnSpc>
+                <a:spcPct val="100000"/>
+              </a:lnSpc>
+              <a:spcAft>
+                <a:spcPts val="300"/>
+              </a:spcAft>
+            </a:pPr>
+            <a:r>
+              <a:rPr sz="900" b="1">
+                <a:solidFill>
+                  <a:srgbClr val="067647"/>
+                </a:solidFill>
+                <a:latin typeface="Microsoft JhengHei"/>
+              </a:rPr>
+              <a:t>ok</a:t>
+            </a:r>
+          </a:p>
+        </p:txBody>
+      </p:sp>
+      <p:sp>
+        <p:nvSpPr>
+          <p:cNvPr id="61" name="Rectangle 60"/>
+          <p:cNvSpPr/>
+          <p:nvPr/>
+        </p:nvSpPr>
+        <p:spPr>
+          <a:xfrm>
+            <a:off x="7882127" y="3401568"/>
+            <a:ext cx="3703320" cy="507492"/>
+          </a:xfrm>
+          <a:prstGeom prst="rect">
+            <a:avLst/>
+          </a:prstGeom>
+          <a:solidFill>
+            <a:srgbClr val="F8FAFC"/>
+          </a:solidFill>
+          <a:ln w="6350">
+            <a:solidFill>
+              <a:srgbClr val="E4E7EC"/>
+            </a:solidFill>
+          </a:ln>
+          <a:effectLst/>
+        </p:spPr>
+        <p:style>
+          <a:lnRef idx="1">
+            <a:schemeClr val="accent1"/>
+          </a:lnRef>
+          <a:fillRef idx="3">
+            <a:schemeClr val="accent1"/>
+          </a:fillRef>
+          <a:effectRef idx="2">
+            <a:schemeClr val="accent1"/>
+          </a:effectRef>
+          <a:fontRef idx="minor">
+            <a:schemeClr val="lt1"/>
+          </a:fontRef>
+        </p:style>
+        <p:txBody>
+          <a:bodyPr rtlCol="0" anchor="ctr"/>
+          <a:lstStyle/>
+          <a:p>
+            <a:pPr algn="ctr"/>
+          </a:p>
+        </p:txBody>
+      </p:sp>
+      <p:sp>
+        <p:nvSpPr>
+          <p:cNvPr id="62" name="TextBox 61"/>
+          <p:cNvSpPr txBox="1"/>
+          <p:nvPr/>
+        </p:nvSpPr>
+        <p:spPr>
+          <a:xfrm>
+            <a:off x="7955279" y="3401568"/>
+            <a:ext cx="2011680" cy="507492"/>
+          </a:xfrm>
+          <a:prstGeom prst="rect">
+            <a:avLst/>
+          </a:prstGeom>
+          <a:noFill/>
+        </p:spPr>
+        <p:txBody>
+          <a:bodyPr wrap="square" anchor="ctr">
+            <a:spAutoFit/>
+          </a:bodyPr>
+          <a:lstStyle/>
+          <a:p>
+            <a:pPr algn="l">
+              <a:lnSpc>
+                <a:spcPct val="100000"/>
+              </a:lnSpc>
+              <a:spcAft>
+                <a:spcPts val="300"/>
+              </a:spcAft>
+            </a:pPr>
+            <a:r>
+              <a:rPr sz="900" b="1">
+                <a:solidFill>
+                  <a:srgbClr val="667085"/>
+                </a:solidFill>
+                <a:latin typeface="Consolas"/>
+              </a:rPr>
+              <a:t>14 </a:t>
+            </a:r>
+            <a:r>
+              <a:rPr sz="1050" b="0">
+                <a:solidFill>
+                  <a:srgbClr val="1F2933"/>
+                </a:solidFill>
+                <a:latin typeface="Microsoft JhengHei"/>
+              </a:rPr>
+              <a:t>patrol-status</a:t>
+            </a:r>
+          </a:p>
+        </p:txBody>
+      </p:sp>
+      <p:sp>
+        <p:nvSpPr>
+          <p:cNvPr id="63" name="TextBox 62"/>
+          <p:cNvSpPr txBox="1"/>
+          <p:nvPr/>
+        </p:nvSpPr>
+        <p:spPr>
+          <a:xfrm>
+            <a:off x="9756647" y="3401568"/>
+            <a:ext cx="1005840" cy="507492"/>
+          </a:xfrm>
+          <a:prstGeom prst="rect">
+            <a:avLst/>
+          </a:prstGeom>
+          <a:noFill/>
+        </p:spPr>
+        <p:txBody>
+          <a:bodyPr wrap="square" anchor="ctr">
+            <a:spAutoFit/>
+          </a:bodyPr>
+          <a:lstStyle/>
+          <a:p>
+            <a:pPr algn="r">
+              <a:lnSpc>
+                <a:spcPct val="100000"/>
+              </a:lnSpc>
+              <a:spcAft>
+                <a:spcPts val="300"/>
+              </a:spcAft>
+            </a:pPr>
+            <a:r>
+              <a:rPr sz="950" b="0">
+                <a:solidFill>
+                  <a:srgbClr val="667085"/>
+                </a:solidFill>
+                <a:latin typeface="Consolas"/>
+              </a:rPr>
+              <a:t>39r · 158s</a:t>
+            </a:r>
+          </a:p>
+        </p:txBody>
+      </p:sp>
+      <p:sp>
+        <p:nvSpPr>
+          <p:cNvPr id="64" name="Rectangle 63"/>
+          <p:cNvSpPr/>
+          <p:nvPr/>
+        </p:nvSpPr>
+        <p:spPr>
+          <a:xfrm>
+            <a:off x="10981943" y="3511296"/>
+            <a:ext cx="502920" cy="283464"/>
+          </a:xfrm>
+          <a:prstGeom prst="rect">
+            <a:avLst/>
+          </a:prstGeom>
+          <a:solidFill>
+            <a:srgbClr val="ECFDF3"/>
+          </a:solidFill>
+          <a:ln w="9525">
+            <a:solidFill>
+              <a:srgbClr val="A6F4C5"/>
+            </a:solidFill>
+          </a:ln>
+          <a:effectLst/>
+        </p:spPr>
+        <p:style>
+          <a:lnRef idx="1">
+            <a:schemeClr val="accent1"/>
+          </a:lnRef>
+          <a:fillRef idx="3">
+            <a:schemeClr val="accent1"/>
+          </a:fillRef>
+          <a:effectRef idx="2">
+            <a:schemeClr val="accent1"/>
+          </a:effectRef>
+          <a:fontRef idx="minor">
+            <a:schemeClr val="lt1"/>
+          </a:fontRef>
+        </p:style>
+        <p:txBody>
+          <a:bodyPr rtlCol="0" anchor="ctr" wrap="square"/>
+          <a:lstStyle/>
+          <a:p>
+            <a:pPr algn="ctr">
+              <a:lnSpc>
+                <a:spcPct val="100000"/>
+              </a:lnSpc>
+              <a:spcAft>
+                <a:spcPts val="300"/>
+              </a:spcAft>
+            </a:pPr>
+            <a:r>
+              <a:rPr sz="900" b="1">
+                <a:solidFill>
+                  <a:srgbClr val="067647"/>
+                </a:solidFill>
+                <a:latin typeface="Microsoft JhengHei"/>
+              </a:rPr>
+              <a:t>ok</a:t>
+            </a:r>
+          </a:p>
+        </p:txBody>
+      </p:sp>
+      <p:sp>
+        <p:nvSpPr>
+          <p:cNvPr id="65" name="Rectangle 64"/>
+          <p:cNvSpPr/>
+          <p:nvPr/>
+        </p:nvSpPr>
+        <p:spPr>
+          <a:xfrm>
+            <a:off x="7882127" y="3909060"/>
+            <a:ext cx="3703320" cy="507492"/>
+          </a:xfrm>
+          <a:prstGeom prst="rect">
+            <a:avLst/>
+          </a:prstGeom>
+          <a:solidFill>
+            <a:srgbClr val="FFFFFF"/>
+          </a:solidFill>
+          <a:ln w="6350">
+            <a:solidFill>
+              <a:srgbClr val="E4E7EC"/>
+            </a:solidFill>
+          </a:ln>
+          <a:effectLst/>
+        </p:spPr>
+        <p:style>
+          <a:lnRef idx="1">
+            <a:schemeClr val="accent1"/>
+          </a:lnRef>
+          <a:fillRef idx="3">
+            <a:schemeClr val="accent1"/>
+          </a:fillRef>
+          <a:effectRef idx="2">
+            <a:schemeClr val="accent1"/>
+          </a:effectRef>
+          <a:fontRef idx="minor">
+            <a:schemeClr val="lt1"/>
+          </a:fontRef>
+        </p:style>
+        <p:txBody>
+          <a:bodyPr rtlCol="0" anchor="ctr"/>
+          <a:lstStyle/>
+          <a:p>
+            <a:pPr algn="ctr"/>
+          </a:p>
+        </p:txBody>
+      </p:sp>
+      <p:sp>
+        <p:nvSpPr>
+          <p:cNvPr id="66" name="TextBox 65"/>
+          <p:cNvSpPr txBox="1"/>
+          <p:nvPr/>
+        </p:nvSpPr>
+        <p:spPr>
+          <a:xfrm>
+            <a:off x="7955279" y="3909060"/>
+            <a:ext cx="2011680" cy="507492"/>
+          </a:xfrm>
+          <a:prstGeom prst="rect">
+            <a:avLst/>
+          </a:prstGeom>
+          <a:noFill/>
+        </p:spPr>
+        <p:txBody>
+          <a:bodyPr wrap="square" anchor="ctr">
+            <a:spAutoFit/>
+          </a:bodyPr>
+          <a:lstStyle/>
+          <a:p>
+            <a:pPr algn="l">
+              <a:lnSpc>
+                <a:spcPct val="100000"/>
+              </a:lnSpc>
+              <a:spcAft>
+                <a:spcPts val="300"/>
+              </a:spcAft>
+            </a:pPr>
+            <a:r>
+              <a:rPr sz="900" b="1">
+                <a:solidFill>
+                  <a:srgbClr val="667085"/>
+                </a:solidFill>
+                <a:latin typeface="Consolas"/>
+              </a:rPr>
+              <a:t>15 </a:t>
+            </a:r>
+            <a:r>
+              <a:rPr sz="1050" b="0">
+                <a:solidFill>
+                  <a:srgbClr val="1F2933"/>
+                </a:solidFill>
+                <a:latin typeface="Microsoft JhengHei"/>
+              </a:rPr>
+              <a:t>ooc-ranking</a:t>
+            </a:r>
+          </a:p>
+        </p:txBody>
+      </p:sp>
+      <p:sp>
+        <p:nvSpPr>
+          <p:cNvPr id="67" name="TextBox 66"/>
+          <p:cNvSpPr txBox="1"/>
+          <p:nvPr/>
+        </p:nvSpPr>
+        <p:spPr>
+          <a:xfrm>
+            <a:off x="9756647" y="3909060"/>
+            <a:ext cx="1005840" cy="507492"/>
+          </a:xfrm>
+          <a:prstGeom prst="rect">
+            <a:avLst/>
+          </a:prstGeom>
+          <a:noFill/>
+        </p:spPr>
+        <p:txBody>
+          <a:bodyPr wrap="square" anchor="ctr">
+            <a:spAutoFit/>
+          </a:bodyPr>
+          <a:lstStyle/>
+          <a:p>
+            <a:pPr algn="r">
+              <a:lnSpc>
+                <a:spcPct val="100000"/>
+              </a:lnSpc>
+              <a:spcAft>
+                <a:spcPts val="300"/>
+              </a:spcAft>
+            </a:pPr>
+            <a:r>
+              <a:rPr sz="950" b="0">
+                <a:solidFill>
+                  <a:srgbClr val="667085"/>
+                </a:solidFill>
+                <a:latin typeface="Consolas"/>
+              </a:rPr>
+              <a:t>6r · 73s</a:t>
+            </a:r>
+          </a:p>
+        </p:txBody>
+      </p:sp>
+      <p:sp>
+        <p:nvSpPr>
+          <p:cNvPr id="68" name="Rectangle 67"/>
+          <p:cNvSpPr/>
+          <p:nvPr/>
+        </p:nvSpPr>
+        <p:spPr>
+          <a:xfrm>
+            <a:off x="10981943" y="4018788"/>
+            <a:ext cx="502920" cy="283464"/>
+          </a:xfrm>
+          <a:prstGeom prst="rect">
+            <a:avLst/>
+          </a:prstGeom>
+          <a:solidFill>
+            <a:srgbClr val="ECFDF3"/>
+          </a:solidFill>
+          <a:ln w="9525">
+            <a:solidFill>
+              <a:srgbClr val="A6F4C5"/>
+            </a:solidFill>
+          </a:ln>
+          <a:effectLst/>
+        </p:spPr>
+        <p:style>
+          <a:lnRef idx="1">
+            <a:schemeClr val="accent1"/>
+          </a:lnRef>
+          <a:fillRef idx="3">
+            <a:schemeClr val="accent1"/>
+          </a:fillRef>
+          <a:effectRef idx="2">
+            <a:schemeClr val="accent1"/>
+          </a:effectRef>
+          <a:fontRef idx="minor">
+            <a:schemeClr val="lt1"/>
+          </a:fontRef>
+        </p:style>
+        <p:txBody>
+          <a:bodyPr rtlCol="0" anchor="ctr" wrap="square"/>
+          <a:lstStyle/>
+          <a:p>
+            <a:pPr algn="ctr">
+              <a:lnSpc>
+                <a:spcPct val="100000"/>
+              </a:lnSpc>
+              <a:spcAft>
+                <a:spcPts val="300"/>
+              </a:spcAft>
+            </a:pPr>
+            <a:r>
+              <a:rPr sz="900" b="1">
+                <a:solidFill>
+                  <a:srgbClr val="067647"/>
+                </a:solidFill>
+                <a:latin typeface="Microsoft JhengHei"/>
+              </a:rPr>
+              <a:t>ok</a:t>
+            </a:r>
+          </a:p>
+        </p:txBody>
+      </p:sp>
+      <p:sp>
+        <p:nvSpPr>
+          <p:cNvPr id="69" name="Rectangle 68"/>
+          <p:cNvSpPr/>
+          <p:nvPr/>
+        </p:nvSpPr>
+        <p:spPr>
+          <a:xfrm>
+            <a:off x="7882127" y="4416552"/>
+            <a:ext cx="3703320" cy="507492"/>
+          </a:xfrm>
+          <a:prstGeom prst="rect">
+            <a:avLst/>
+          </a:prstGeom>
+          <a:solidFill>
+            <a:srgbClr val="F8FAFC"/>
+          </a:solidFill>
+          <a:ln w="6350">
+            <a:solidFill>
+              <a:srgbClr val="E4E7EC"/>
+            </a:solidFill>
+          </a:ln>
+          <a:effectLst/>
+        </p:spPr>
+        <p:style>
+          <a:lnRef idx="1">
+            <a:schemeClr val="accent1"/>
+          </a:lnRef>
+          <a:fillRef idx="3">
+            <a:schemeClr val="accent1"/>
+          </a:fillRef>
+          <a:effectRef idx="2">
+            <a:schemeClr val="accent1"/>
+          </a:effectRef>
+          <a:fontRef idx="minor">
+            <a:schemeClr val="lt1"/>
+          </a:fontRef>
+        </p:style>
+        <p:txBody>
+          <a:bodyPr rtlCol="0" anchor="ctr"/>
+          <a:lstStyle/>
+          <a:p>
+            <a:pPr algn="ctr"/>
+          </a:p>
+        </p:txBody>
+      </p:sp>
+      <p:sp>
+        <p:nvSpPr>
+          <p:cNvPr id="70" name="TextBox 69"/>
+          <p:cNvSpPr txBox="1"/>
+          <p:nvPr/>
+        </p:nvSpPr>
+        <p:spPr>
+          <a:xfrm>
+            <a:off x="7955279" y="4416552"/>
+            <a:ext cx="2011680" cy="507492"/>
+          </a:xfrm>
+          <a:prstGeom prst="rect">
+            <a:avLst/>
+          </a:prstGeom>
+          <a:noFill/>
+        </p:spPr>
+        <p:txBody>
+          <a:bodyPr wrap="square" anchor="ctr">
+            <a:spAutoFit/>
+          </a:bodyPr>
+          <a:lstStyle/>
+          <a:p>
+            <a:pPr algn="l">
+              <a:lnSpc>
+                <a:spcPct val="100000"/>
+              </a:lnSpc>
+              <a:spcAft>
+                <a:spcPts val="300"/>
+              </a:spcAft>
+            </a:pPr>
+            <a:r>
+              <a:rPr sz="900" b="1">
+                <a:solidFill>
+                  <a:srgbClr val="667085"/>
+                </a:solidFill>
+                <a:latin typeface="Consolas"/>
+              </a:rPr>
+              <a:t>16 </a:t>
+            </a:r>
+            <a:r>
+              <a:rPr sz="1050" b="0">
+                <a:solidFill>
+                  <a:srgbClr val="1F2933"/>
+                </a:solidFill>
+                <a:latin typeface="Microsoft JhengHei"/>
+              </a:rPr>
+              <a:t>ooc-pareto</a:t>
+            </a:r>
+          </a:p>
+        </p:txBody>
+      </p:sp>
+      <p:sp>
+        <p:nvSpPr>
+          <p:cNvPr id="71" name="TextBox 70"/>
+          <p:cNvSpPr txBox="1"/>
+          <p:nvPr/>
+        </p:nvSpPr>
+        <p:spPr>
+          <a:xfrm>
+            <a:off x="9756647" y="4416552"/>
+            <a:ext cx="1005840" cy="507492"/>
+          </a:xfrm>
+          <a:prstGeom prst="rect">
+            <a:avLst/>
+          </a:prstGeom>
+          <a:noFill/>
+        </p:spPr>
+        <p:txBody>
+          <a:bodyPr wrap="square" anchor="ctr">
+            <a:spAutoFit/>
+          </a:bodyPr>
+          <a:lstStyle/>
+          <a:p>
+            <a:pPr algn="r">
+              <a:lnSpc>
+                <a:spcPct val="100000"/>
+              </a:lnSpc>
+              <a:spcAft>
+                <a:spcPts val="300"/>
+              </a:spcAft>
+            </a:pPr>
+            <a:r>
+              <a:rPr sz="950" b="0">
+                <a:solidFill>
+                  <a:srgbClr val="667085"/>
+                </a:solidFill>
+                <a:latin typeface="Consolas"/>
+              </a:rPr>
+              <a:t>7r · 56s</a:t>
+            </a:r>
+          </a:p>
+        </p:txBody>
+      </p:sp>
+      <p:sp>
+        <p:nvSpPr>
+          <p:cNvPr id="72" name="Rectangle 71"/>
+          <p:cNvSpPr/>
+          <p:nvPr/>
+        </p:nvSpPr>
+        <p:spPr>
+          <a:xfrm>
+            <a:off x="10981943" y="4526280"/>
+            <a:ext cx="502920" cy="283464"/>
+          </a:xfrm>
+          <a:prstGeom prst="rect">
+            <a:avLst/>
+          </a:prstGeom>
+          <a:solidFill>
+            <a:srgbClr val="ECFDF3"/>
+          </a:solidFill>
+          <a:ln w="9525">
+            <a:solidFill>
+              <a:srgbClr val="A6F4C5"/>
+            </a:solidFill>
+          </a:ln>
+          <a:effectLst/>
+        </p:spPr>
+        <p:style>
+          <a:lnRef idx="1">
+            <a:schemeClr val="accent1"/>
+          </a:lnRef>
+          <a:fillRef idx="3">
+            <a:schemeClr val="accent1"/>
+          </a:fillRef>
+          <a:effectRef idx="2">
+            <a:schemeClr val="accent1"/>
+          </a:effectRef>
+          <a:fontRef idx="minor">
+            <a:schemeClr val="lt1"/>
+          </a:fontRef>
+        </p:style>
+        <p:txBody>
+          <a:bodyPr rtlCol="0" anchor="ctr" wrap="square"/>
+          <a:lstStyle/>
+          <a:p>
+            <a:pPr algn="ctr">
+              <a:lnSpc>
+                <a:spcPct val="100000"/>
+              </a:lnSpc>
+              <a:spcAft>
+                <a:spcPts val="300"/>
+              </a:spcAft>
+            </a:pPr>
+            <a:r>
+              <a:rPr sz="900" b="1">
+                <a:solidFill>
+                  <a:srgbClr val="067647"/>
+                </a:solidFill>
+                <a:latin typeface="Microsoft JhengHei"/>
+              </a:rPr>
+              <a:t>ok</a:t>
+            </a:r>
+          </a:p>
+        </p:txBody>
+      </p:sp>
+      <p:sp>
+        <p:nvSpPr>
+          <p:cNvPr id="73" name="Rectangle 72"/>
+          <p:cNvSpPr/>
+          <p:nvPr/>
+        </p:nvSpPr>
+        <p:spPr>
+          <a:xfrm>
+            <a:off x="7882127" y="4924044"/>
+            <a:ext cx="3703320" cy="507492"/>
+          </a:xfrm>
+          <a:prstGeom prst="rect">
+            <a:avLst/>
+          </a:prstGeom>
+          <a:solidFill>
+            <a:srgbClr val="FFFFFF"/>
+          </a:solidFill>
+          <a:ln w="6350">
+            <a:solidFill>
+              <a:srgbClr val="E4E7EC"/>
+            </a:solidFill>
+          </a:ln>
+          <a:effectLst/>
+        </p:spPr>
+        <p:style>
+          <a:lnRef idx="1">
+            <a:schemeClr val="accent1"/>
+          </a:lnRef>
+          <a:fillRef idx="3">
+            <a:schemeClr val="accent1"/>
+          </a:fillRef>
+          <a:effectRef idx="2">
+            <a:schemeClr val="accent1"/>
+          </a:effectRef>
+          <a:fontRef idx="minor">
+            <a:schemeClr val="lt1"/>
+          </a:fontRef>
+        </p:style>
+        <p:txBody>
+          <a:bodyPr rtlCol="0" anchor="ctr"/>
+          <a:lstStyle/>
+          <a:p>
+            <a:pPr algn="ctr"/>
+          </a:p>
+        </p:txBody>
+      </p:sp>
+      <p:sp>
+        <p:nvSpPr>
+          <p:cNvPr id="74" name="TextBox 73"/>
+          <p:cNvSpPr txBox="1"/>
+          <p:nvPr/>
+        </p:nvSpPr>
+        <p:spPr>
+          <a:xfrm>
+            <a:off x="7955279" y="4924044"/>
+            <a:ext cx="2011680" cy="507492"/>
+          </a:xfrm>
+          <a:prstGeom prst="rect">
+            <a:avLst/>
+          </a:prstGeom>
+          <a:noFill/>
+        </p:spPr>
+        <p:txBody>
+          <a:bodyPr wrap="square" anchor="ctr">
+            <a:spAutoFit/>
+          </a:bodyPr>
+          <a:lstStyle/>
+          <a:p>
+            <a:pPr algn="l">
+              <a:lnSpc>
+                <a:spcPct val="100000"/>
+              </a:lnSpc>
+              <a:spcAft>
+                <a:spcPts val="300"/>
+              </a:spcAft>
+            </a:pPr>
+            <a:r>
+              <a:rPr sz="900" b="1">
+                <a:solidFill>
+                  <a:srgbClr val="667085"/>
+                </a:solidFill>
+                <a:latin typeface="Consolas"/>
+              </a:rPr>
+              <a:t>17 </a:t>
+            </a:r>
+            <a:r>
+              <a:rPr sz="1050" b="0">
+                <a:solidFill>
+                  <a:srgbClr val="1F2933"/>
+                </a:solidFill>
+                <a:latin typeface="Microsoft JhengHei"/>
+              </a:rPr>
+              <a:t>step-yield</a:t>
+            </a:r>
+          </a:p>
+        </p:txBody>
+      </p:sp>
+      <p:sp>
+        <p:nvSpPr>
+          <p:cNvPr id="75" name="TextBox 74"/>
+          <p:cNvSpPr txBox="1"/>
+          <p:nvPr/>
+        </p:nvSpPr>
+        <p:spPr>
+          <a:xfrm>
+            <a:off x="9756647" y="4924044"/>
+            <a:ext cx="1005840" cy="507492"/>
+          </a:xfrm>
+          <a:prstGeom prst="rect">
+            <a:avLst/>
+          </a:prstGeom>
+          <a:noFill/>
+        </p:spPr>
+        <p:txBody>
+          <a:bodyPr wrap="square" anchor="ctr">
+            <a:spAutoFit/>
+          </a:bodyPr>
+          <a:lstStyle/>
+          <a:p>
+            <a:pPr algn="r">
+              <a:lnSpc>
+                <a:spcPct val="100000"/>
+              </a:lnSpc>
+              <a:spcAft>
+                <a:spcPts val="300"/>
+              </a:spcAft>
+            </a:pPr>
+            <a:r>
+              <a:rPr sz="950" b="0">
+                <a:solidFill>
+                  <a:srgbClr val="667085"/>
+                </a:solidFill>
+                <a:latin typeface="Consolas"/>
+              </a:rPr>
+              <a:t>9r · 49s</a:t>
+            </a:r>
+          </a:p>
+        </p:txBody>
+      </p:sp>
+      <p:sp>
+        <p:nvSpPr>
+          <p:cNvPr id="76" name="Rectangle 75"/>
+          <p:cNvSpPr/>
+          <p:nvPr/>
+        </p:nvSpPr>
+        <p:spPr>
+          <a:xfrm>
+            <a:off x="10981943" y="5033772"/>
+            <a:ext cx="502920" cy="283464"/>
+          </a:xfrm>
+          <a:prstGeom prst="rect">
+            <a:avLst/>
+          </a:prstGeom>
+          <a:solidFill>
+            <a:srgbClr val="ECFDF3"/>
+          </a:solidFill>
+          <a:ln w="9525">
+            <a:solidFill>
+              <a:srgbClr val="A6F4C5"/>
+            </a:solidFill>
+          </a:ln>
+          <a:effectLst/>
+        </p:spPr>
+        <p:style>
+          <a:lnRef idx="1">
+            <a:schemeClr val="accent1"/>
+          </a:lnRef>
+          <a:fillRef idx="3">
+            <a:schemeClr val="accent1"/>
+          </a:fillRef>
+          <a:effectRef idx="2">
+            <a:schemeClr val="accent1"/>
+          </a:effectRef>
+          <a:fontRef idx="minor">
+            <a:schemeClr val="lt1"/>
+          </a:fontRef>
+        </p:style>
+        <p:txBody>
+          <a:bodyPr rtlCol="0" anchor="ctr" wrap="square"/>
+          <a:lstStyle/>
+          <a:p>
+            <a:pPr algn="ctr">
+              <a:lnSpc>
+                <a:spcPct val="100000"/>
+              </a:lnSpc>
+              <a:spcAft>
+                <a:spcPts val="300"/>
+              </a:spcAft>
+            </a:pPr>
+            <a:r>
+              <a:rPr sz="900" b="1">
+                <a:solidFill>
+                  <a:srgbClr val="067647"/>
+                </a:solidFill>
+                <a:latin typeface="Microsoft JhengHei"/>
+              </a:rPr>
+              <a:t>ok</a:t>
+            </a:r>
+          </a:p>
+        </p:txBody>
+      </p:sp>
+      <p:sp>
+        <p:nvSpPr>
+          <p:cNvPr id="77" name="TextBox 76"/>
+          <p:cNvSpPr txBox="1"/>
+          <p:nvPr/>
+        </p:nvSpPr>
+        <p:spPr>
+          <a:xfrm>
+            <a:off x="502920" y="6437376"/>
+            <a:ext cx="10058400" cy="301752"/>
+          </a:xfrm>
+          <a:prstGeom prst="rect">
+            <a:avLst/>
+          </a:prstGeom>
+          <a:noFill/>
+        </p:spPr>
+        <p:txBody>
+          <a:bodyPr wrap="square" anchor="t">
+            <a:spAutoFit/>
+          </a:bodyPr>
+          <a:lstStyle/>
+          <a:p>
+            <a:pPr algn="l">
+              <a:lnSpc>
+                <a:spcPct val="100000"/>
+              </a:lnSpc>
+              <a:spcAft>
+                <a:spcPts val="300"/>
+              </a:spcAft>
+            </a:pPr>
+            <a:r>
+              <a:rPr sz="900" b="0">
+                <a:solidFill>
+                  <a:srgbClr val="667085"/>
+                </a:solidFill>
+                <a:latin typeface="Microsoft JhengHei"/>
+              </a:rPr>
+              <a:t>Builder LLM 四方 bake-off · SLASH-17 · 2026-07</a:t>
+            </a:r>
+          </a:p>
+        </p:txBody>
+      </p:sp>
+      <p:sp>
+        <p:nvSpPr>
+          <p:cNvPr id="78" name="TextBox 77"/>
+          <p:cNvSpPr txBox="1"/>
+          <p:nvPr/>
+        </p:nvSpPr>
+        <p:spPr>
+          <a:xfrm>
+            <a:off x="11155680" y="6437376"/>
+            <a:ext cx="640080" cy="301752"/>
+          </a:xfrm>
+          <a:prstGeom prst="rect">
+            <a:avLst/>
+          </a:prstGeom>
+          <a:noFill/>
+        </p:spPr>
+        <p:txBody>
+          <a:bodyPr wrap="square" anchor="t">
+            <a:spAutoFit/>
+          </a:bodyPr>
+          <a:lstStyle/>
+          <a:p>
+            <a:pPr algn="r">
+              <a:lnSpc>
+                <a:spcPct val="100000"/>
+              </a:lnSpc>
+              <a:spcAft>
+                <a:spcPts val="300"/>
+              </a:spcAft>
+            </a:pPr>
+            <a:r>
+              <a:rPr sz="900" b="1">
+                <a:solidFill>
+                  <a:srgbClr val="667085"/>
+                </a:solidFill>
+                <a:latin typeface="Microsoft JhengHei"/>
+              </a:rPr>
+              <a:t>7</a:t>
+            </a:r>
+          </a:p>
+        </p:txBody>
+      </p:sp>
+    </p:spTree>
+  </p:cSld>
+  <p:clrMapOvr>
+    <a:masterClrMapping/>
+  </p:clrMapOvr>
+</p:sld>
+</file>
+
+<file path=ppt/slides/slide8.xml><?xml version="1.0" encoding="utf-8"?>
+<p:sld xmlns:a="http://schemas.openxmlformats.org/drawingml/2006/main" xmlns:p="http://schemas.openxmlformats.org/presentationml/2006/main" xmlns:r="http://schemas.openxmlformats.org/officeDocument/2006/relationships">
+  <p:cSld>
+    <p:spTree>
+      <p:nvGrpSpPr>
+        <p:cNvPr id="1" name=""/>
+        <p:cNvGrpSpPr/>
+        <p:nvPr/>
+      </p:nvGrpSpPr>
+      <p:grpSpPr/>
+      <p:sp>
+        <p:nvSpPr>
+          <p:cNvPr id="2" name="Rectangle 1"/>
+          <p:cNvSpPr/>
+          <p:nvPr/>
+        </p:nvSpPr>
+        <p:spPr>
+          <a:xfrm>
+            <a:off x="0" y="0"/>
+            <a:ext cx="12191695" cy="1024128"/>
+          </a:xfrm>
+          <a:prstGeom prst="rect">
+            <a:avLst/>
+          </a:prstGeom>
+          <a:solidFill>
+            <a:srgbClr val="0B1F4D"/>
+          </a:solidFill>
+          <a:ln>
+            <a:noFill/>
+          </a:ln>
+          <a:effectLst/>
+        </p:spPr>
+        <p:style>
+          <a:lnRef idx="1">
+            <a:schemeClr val="accent1"/>
+          </a:lnRef>
+          <a:fillRef idx="3">
+            <a:schemeClr val="accent1"/>
+          </a:fillRef>
+          <a:effectRef idx="2">
+            <a:schemeClr val="accent1"/>
+          </a:effectRef>
+          <a:fontRef idx="minor">
+            <a:schemeClr val="lt1"/>
+          </a:fontRef>
+        </p:style>
+        <p:txBody>
+          <a:bodyPr rtlCol="0" anchor="ctr"/>
+          <a:lstStyle/>
+          <a:p>
+            <a:pPr algn="ctr"/>
+          </a:p>
+        </p:txBody>
+      </p:sp>
+      <p:sp>
+        <p:nvSpPr>
+          <p:cNvPr id="3" name="Rectangle 2"/>
+          <p:cNvSpPr/>
+          <p:nvPr/>
+        </p:nvSpPr>
+        <p:spPr>
+          <a:xfrm>
+            <a:off x="0" y="1024128"/>
+            <a:ext cx="12191695" cy="54864"/>
+          </a:xfrm>
+          <a:prstGeom prst="rect">
+            <a:avLst/>
+          </a:prstGeom>
+          <a:solidFill>
+            <a:srgbClr val="1D4ED8"/>
+          </a:solidFill>
+          <a:ln>
+            <a:noFill/>
+          </a:ln>
+          <a:effectLst/>
+        </p:spPr>
+        <p:style>
+          <a:lnRef idx="1">
+            <a:schemeClr val="accent1"/>
+          </a:lnRef>
+          <a:fillRef idx="3">
+            <a:schemeClr val="accent1"/>
+          </a:fillRef>
+          <a:effectRef idx="2">
+            <a:schemeClr val="accent1"/>
+          </a:effectRef>
+          <a:fontRef idx="minor">
+            <a:schemeClr val="lt1"/>
+          </a:fontRef>
+        </p:style>
+        <p:txBody>
+          <a:bodyPr rtlCol="0" anchor="ctr"/>
+          <a:lstStyle/>
+          <a:p>
+            <a:pPr algn="ctr"/>
+          </a:p>
+        </p:txBody>
+      </p:sp>
+      <p:sp>
+        <p:nvSpPr>
+          <p:cNvPr id="4" name="TextBox 3"/>
+          <p:cNvSpPr txBox="1"/>
+          <p:nvPr/>
+        </p:nvSpPr>
+        <p:spPr>
+          <a:xfrm>
+            <a:off x="502920" y="109728"/>
+            <a:ext cx="11155680" cy="868680"/>
+          </a:xfrm>
+          <a:prstGeom prst="rect">
+            <a:avLst/>
+          </a:prstGeom>
+          <a:noFill/>
+        </p:spPr>
+        <p:txBody>
+          <a:bodyPr wrap="square" anchor="t">
+            <a:spAutoFit/>
+          </a:bodyPr>
+          <a:lstStyle/>
+          <a:p>
+            <a:pPr algn="l">
+              <a:lnSpc>
+                <a:spcPct val="100000"/>
+              </a:lnSpc>
+              <a:spcAft>
+                <a:spcPts val="200"/>
+              </a:spcAft>
+            </a:pPr>
+            <a:r>
+              <a:rPr sz="1100" b="1">
+                <a:solidFill>
+                  <a:srgbClr val="9DC0FF"/>
+                </a:solidFill>
+                <a:latin typeface="Microsoft JhengHei"/>
+              </a:rPr>
+              <a:t>結論</a:t>
+            </a:r>
+          </a:p>
+          <a:p>
+            <a:pPr algn="l">
+              <a:lnSpc>
+                <a:spcPct val="100000"/>
+              </a:lnSpc>
+              <a:spcAft>
+                <a:spcPts val="0"/>
+              </a:spcAft>
+            </a:pPr>
+            <a:r>
+              <a:rPr sz="2200" b="1">
+                <a:solidFill>
+                  <a:srgbClr val="FFFFFF"/>
+                </a:solidFill>
+                <a:latin typeface="Microsoft JhengHei"/>
+              </a:rPr>
+              <a:t>定位與建議</a:t>
+            </a:r>
+          </a:p>
+        </p:txBody>
+      </p:sp>
+      <p:sp>
+        <p:nvSpPr>
+          <p:cNvPr id="5" name="Rectangle 4"/>
+          <p:cNvSpPr/>
+          <p:nvPr/>
+        </p:nvSpPr>
+        <p:spPr>
+          <a:xfrm>
+            <a:off x="502920" y="1371600"/>
+            <a:ext cx="11183112" cy="1024128"/>
+          </a:xfrm>
+          <a:prstGeom prst="rect">
+            <a:avLst/>
+          </a:prstGeom>
+          <a:solidFill>
+            <a:srgbClr val="ECFDF3"/>
+          </a:solidFill>
+          <a:ln w="12700">
+            <a:solidFill>
+              <a:srgbClr val="067647"/>
+            </a:solidFill>
+          </a:ln>
+          <a:effectLst/>
+        </p:spPr>
+        <p:style>
+          <a:lnRef idx="1">
+            <a:schemeClr val="accent1"/>
+          </a:lnRef>
+          <a:fillRef idx="3">
+            <a:schemeClr val="accent1"/>
+          </a:fillRef>
+          <a:effectRef idx="2">
+            <a:schemeClr val="accent1"/>
+          </a:effectRef>
+          <a:fontRef idx="minor">
+            <a:schemeClr val="lt1"/>
+          </a:fontRef>
+        </p:style>
+        <p:txBody>
+          <a:bodyPr rtlCol="0" anchor="ctr"/>
+          <a:lstStyle/>
+          <a:p>
+            <a:pPr algn="ctr"/>
+          </a:p>
+        </p:txBody>
+      </p:sp>
+      <p:sp>
+        <p:nvSpPr>
+          <p:cNvPr id="6" name="TextBox 5"/>
+          <p:cNvSpPr txBox="1"/>
+          <p:nvPr/>
+        </p:nvSpPr>
+        <p:spPr>
+          <a:xfrm>
             <a:off x="777240" y="1481328"/>
             <a:ext cx="10607040" cy="822960"/>
           </a:xfrm>
@@ -22792,7 +27199,7 @@
                 </a:solidFill>
                 <a:latin typeface="Microsoft JhengHei"/>
               </a:rPr>
-              <a:t>7</a:t>
+              <a:t>8</a:t>
             </a:r>
           </a:p>
         </p:txBody>
